--- a/Karl_Major Revision/Figures_v2/Trans_figures.pptx
+++ b/Karl_Major Revision/Figures_v2/Trans_figures.pptx
@@ -11,6 +11,7 @@
     <p:sldId id="261" r:id="rId5"/>
     <p:sldId id="258" r:id="rId6"/>
     <p:sldId id="257" r:id="rId7"/>
+    <p:sldId id="262" r:id="rId8"/>
   </p:sldIdLst>
   <p:sldSz cx="12192000" cy="6858000"/>
   <p:notesSz cx="6858000" cy="9144000"/>
@@ -325,7 +326,7 @@
           <a:p>
             <a:fld id="{18AFD033-9734-4099-AB24-E002C0C94B93}" type="datetimeFigureOut">
               <a:rPr lang="en-US" smtClean="0"/>
-              <a:t>4/27/2026</a:t>
+              <a:t>8/9/2026</a:t>
             </a:fld>
             <a:endParaRPr lang="en-US"/>
           </a:p>
@@ -523,7 +524,7 @@
           <a:p>
             <a:fld id="{18AFD033-9734-4099-AB24-E002C0C94B93}" type="datetimeFigureOut">
               <a:rPr lang="en-US" smtClean="0"/>
-              <a:t>4/27/2026</a:t>
+              <a:t>8/9/2026</a:t>
             </a:fld>
             <a:endParaRPr lang="en-US"/>
           </a:p>
@@ -731,7 +732,7 @@
           <a:p>
             <a:fld id="{18AFD033-9734-4099-AB24-E002C0C94B93}" type="datetimeFigureOut">
               <a:rPr lang="en-US" smtClean="0"/>
-              <a:t>4/27/2026</a:t>
+              <a:t>8/9/2026</a:t>
             </a:fld>
             <a:endParaRPr lang="en-US"/>
           </a:p>
@@ -929,7 +930,7 @@
           <a:p>
             <a:fld id="{18AFD033-9734-4099-AB24-E002C0C94B93}" type="datetimeFigureOut">
               <a:rPr lang="en-US" smtClean="0"/>
-              <a:t>4/27/2026</a:t>
+              <a:t>8/9/2026</a:t>
             </a:fld>
             <a:endParaRPr lang="en-US"/>
           </a:p>
@@ -1204,7 +1205,7 @@
           <a:p>
             <a:fld id="{18AFD033-9734-4099-AB24-E002C0C94B93}" type="datetimeFigureOut">
               <a:rPr lang="en-US" smtClean="0"/>
-              <a:t>4/27/2026</a:t>
+              <a:t>8/9/2026</a:t>
             </a:fld>
             <a:endParaRPr lang="en-US"/>
           </a:p>
@@ -1469,7 +1470,7 @@
           <a:p>
             <a:fld id="{18AFD033-9734-4099-AB24-E002C0C94B93}" type="datetimeFigureOut">
               <a:rPr lang="en-US" smtClean="0"/>
-              <a:t>4/27/2026</a:t>
+              <a:t>8/9/2026</a:t>
             </a:fld>
             <a:endParaRPr lang="en-US"/>
           </a:p>
@@ -1881,7 +1882,7 @@
           <a:p>
             <a:fld id="{18AFD033-9734-4099-AB24-E002C0C94B93}" type="datetimeFigureOut">
               <a:rPr lang="en-US" smtClean="0"/>
-              <a:t>4/27/2026</a:t>
+              <a:t>8/9/2026</a:t>
             </a:fld>
             <a:endParaRPr lang="en-US"/>
           </a:p>
@@ -2022,7 +2023,7 @@
           <a:p>
             <a:fld id="{18AFD033-9734-4099-AB24-E002C0C94B93}" type="datetimeFigureOut">
               <a:rPr lang="en-US" smtClean="0"/>
-              <a:t>4/27/2026</a:t>
+              <a:t>8/9/2026</a:t>
             </a:fld>
             <a:endParaRPr lang="en-US"/>
           </a:p>
@@ -2135,7 +2136,7 @@
           <a:p>
             <a:fld id="{18AFD033-9734-4099-AB24-E002C0C94B93}" type="datetimeFigureOut">
               <a:rPr lang="en-US" smtClean="0"/>
-              <a:t>4/27/2026</a:t>
+              <a:t>8/9/2026</a:t>
             </a:fld>
             <a:endParaRPr lang="en-US"/>
           </a:p>
@@ -2446,7 +2447,7 @@
           <a:p>
             <a:fld id="{18AFD033-9734-4099-AB24-E002C0C94B93}" type="datetimeFigureOut">
               <a:rPr lang="en-US" smtClean="0"/>
-              <a:t>4/27/2026</a:t>
+              <a:t>8/9/2026</a:t>
             </a:fld>
             <a:endParaRPr lang="en-US"/>
           </a:p>
@@ -2734,7 +2735,7 @@
           <a:p>
             <a:fld id="{18AFD033-9734-4099-AB24-E002C0C94B93}" type="datetimeFigureOut">
               <a:rPr lang="en-US" smtClean="0"/>
-              <a:t>4/27/2026</a:t>
+              <a:t>8/9/2026</a:t>
             </a:fld>
             <a:endParaRPr lang="en-US"/>
           </a:p>
@@ -2975,7 +2976,7 @@
           <a:p>
             <a:fld id="{18AFD033-9734-4099-AB24-E002C0C94B93}" type="datetimeFigureOut">
               <a:rPr lang="en-US" smtClean="0"/>
-              <a:t>4/27/2026</a:t>
+              <a:t>8/9/2026</a:t>
             </a:fld>
             <a:endParaRPr lang="en-US"/>
           </a:p>
@@ -9752,6 +9753,3894 @@
 </p:sld>
 </file>
 
+<file path=ppt/slides/slide7.xml><?xml version="1.0" encoding="utf-8"?>
+<p:sld xmlns:a="http://schemas.openxmlformats.org/drawingml/2006/main" xmlns:r="http://schemas.openxmlformats.org/officeDocument/2006/relationships" xmlns:p="http://schemas.openxmlformats.org/presentationml/2006/main">
+  <p:cSld>
+    <p:spTree>
+      <p:nvGrpSpPr>
+        <p:cNvPr id="1" name=""/>
+        <p:cNvGrpSpPr/>
+        <p:nvPr/>
+      </p:nvGrpSpPr>
+      <p:grpSpPr>
+        <a:xfrm>
+          <a:off x="0" y="0"/>
+          <a:ext cx="0" cy="0"/>
+          <a:chOff x="0" y="0"/>
+          <a:chExt cx="0" cy="0"/>
+        </a:xfrm>
+      </p:grpSpPr>
+      <p:pic>
+        <p:nvPicPr>
+          <p:cNvPr id="192" name="Picture 191" descr="O&#10;&#10;AI-generated content may be incorrect.">
+            <a:extLst>
+              <a:ext uri="{FF2B5EF4-FFF2-40B4-BE49-F238E27FC236}">
+                <a16:creationId xmlns:a16="http://schemas.microsoft.com/office/drawing/2014/main" id="{3B4C8BC9-A521-7673-3D6F-11BDFF3F8A3F}"/>
+              </a:ext>
+            </a:extLst>
+          </p:cNvPr>
+          <p:cNvPicPr>
+            <a:picLocks noChangeAspect="1"/>
+          </p:cNvPicPr>
+          <p:nvPr/>
+        </p:nvPicPr>
+        <p:blipFill>
+          <a:blip r:embed="rId2"/>
+          <a:stretch>
+            <a:fillRect/>
+          </a:stretch>
+        </p:blipFill>
+        <p:spPr>
+          <a:xfrm>
+            <a:off x="-2986224" y="-3986730"/>
+            <a:ext cx="8077259" cy="5610266"/>
+          </a:xfrm>
+          <a:prstGeom prst="rect">
+            <a:avLst/>
+          </a:prstGeom>
+        </p:spPr>
+      </p:pic>
+      <p:sp>
+        <p:nvSpPr>
+          <p:cNvPr id="11" name="Rectangle 10">
+            <a:extLst>
+              <a:ext uri="{FF2B5EF4-FFF2-40B4-BE49-F238E27FC236}">
+                <a16:creationId xmlns:a16="http://schemas.microsoft.com/office/drawing/2014/main" id="{24423486-AD68-C226-C954-C313D66C874E}"/>
+              </a:ext>
+            </a:extLst>
+          </p:cNvPr>
+          <p:cNvSpPr/>
+          <p:nvPr/>
+        </p:nvSpPr>
+        <p:spPr>
+          <a:xfrm>
+            <a:off x="466724" y="1661160"/>
+            <a:ext cx="5387340" cy="3569970"/>
+          </a:xfrm>
+          <a:prstGeom prst="rect">
+            <a:avLst/>
+          </a:prstGeom>
+          <a:solidFill>
+            <a:srgbClr val="808080"/>
+          </a:solidFill>
+          <a:ln>
+            <a:noFill/>
+          </a:ln>
+        </p:spPr>
+        <p:style>
+          <a:lnRef idx="2">
+            <a:schemeClr val="accent1">
+              <a:shade val="15000"/>
+            </a:schemeClr>
+          </a:lnRef>
+          <a:fillRef idx="1">
+            <a:schemeClr val="accent1"/>
+          </a:fillRef>
+          <a:effectRef idx="0">
+            <a:schemeClr val="accent1"/>
+          </a:effectRef>
+          <a:fontRef idx="minor">
+            <a:schemeClr val="lt1"/>
+          </a:fontRef>
+        </p:style>
+        <p:txBody>
+          <a:bodyPr rtlCol="0" anchor="ctr"/>
+          <a:lstStyle/>
+          <a:p>
+            <a:pPr algn="ctr"/>
+            <a:endParaRPr lang="en-US"/>
+          </a:p>
+        </p:txBody>
+      </p:sp>
+      <p:sp>
+        <p:nvSpPr>
+          <p:cNvPr id="13" name="Rectangle 12">
+            <a:extLst>
+              <a:ext uri="{FF2B5EF4-FFF2-40B4-BE49-F238E27FC236}">
+                <a16:creationId xmlns:a16="http://schemas.microsoft.com/office/drawing/2014/main" id="{D00C0514-15AD-049F-587B-2697C3896F48}"/>
+              </a:ext>
+            </a:extLst>
+          </p:cNvPr>
+          <p:cNvSpPr/>
+          <p:nvPr/>
+        </p:nvSpPr>
+        <p:spPr>
+          <a:xfrm>
+            <a:off x="1119192" y="2250281"/>
+            <a:ext cx="1401841" cy="2391728"/>
+          </a:xfrm>
+          <a:prstGeom prst="rect">
+            <a:avLst/>
+          </a:prstGeom>
+          <a:solidFill>
+            <a:schemeClr val="bg1"/>
+          </a:solidFill>
+          <a:ln>
+            <a:noFill/>
+          </a:ln>
+        </p:spPr>
+        <p:style>
+          <a:lnRef idx="2">
+            <a:schemeClr val="accent1">
+              <a:shade val="15000"/>
+            </a:schemeClr>
+          </a:lnRef>
+          <a:fillRef idx="1">
+            <a:schemeClr val="accent1"/>
+          </a:fillRef>
+          <a:effectRef idx="0">
+            <a:schemeClr val="accent1"/>
+          </a:effectRef>
+          <a:fontRef idx="minor">
+            <a:schemeClr val="lt1"/>
+          </a:fontRef>
+        </p:style>
+        <p:txBody>
+          <a:bodyPr rtlCol="0" anchor="ctr"/>
+          <a:lstStyle/>
+          <a:p>
+            <a:pPr algn="ctr"/>
+            <a:endParaRPr lang="en-US"/>
+          </a:p>
+        </p:txBody>
+      </p:sp>
+      <p:sp>
+        <p:nvSpPr>
+          <p:cNvPr id="15" name="Rectangle 14">
+            <a:extLst>
+              <a:ext uri="{FF2B5EF4-FFF2-40B4-BE49-F238E27FC236}">
+                <a16:creationId xmlns:a16="http://schemas.microsoft.com/office/drawing/2014/main" id="{4C27BD7D-CF72-A760-078C-26C9AB9285A7}"/>
+              </a:ext>
+            </a:extLst>
+          </p:cNvPr>
+          <p:cNvSpPr/>
+          <p:nvPr/>
+        </p:nvSpPr>
+        <p:spPr>
+          <a:xfrm>
+            <a:off x="3681738" y="2250281"/>
+            <a:ext cx="1491616" cy="2391728"/>
+          </a:xfrm>
+          <a:prstGeom prst="rect">
+            <a:avLst/>
+          </a:prstGeom>
+          <a:solidFill>
+            <a:schemeClr val="bg1"/>
+          </a:solidFill>
+          <a:ln>
+            <a:noFill/>
+          </a:ln>
+        </p:spPr>
+        <p:style>
+          <a:lnRef idx="2">
+            <a:schemeClr val="accent1">
+              <a:shade val="15000"/>
+            </a:schemeClr>
+          </a:lnRef>
+          <a:fillRef idx="1">
+            <a:schemeClr val="accent1"/>
+          </a:fillRef>
+          <a:effectRef idx="0">
+            <a:schemeClr val="accent1"/>
+          </a:effectRef>
+          <a:fontRef idx="minor">
+            <a:schemeClr val="lt1"/>
+          </a:fontRef>
+        </p:style>
+        <p:txBody>
+          <a:bodyPr rtlCol="0" anchor="ctr"/>
+          <a:lstStyle/>
+          <a:p>
+            <a:pPr algn="ctr"/>
+            <a:endParaRPr lang="en-US"/>
+          </a:p>
+        </p:txBody>
+      </p:sp>
+      <p:cxnSp>
+        <p:nvCxnSpPr>
+          <p:cNvPr id="28" name="Straight Connector 27">
+            <a:extLst>
+              <a:ext uri="{FF2B5EF4-FFF2-40B4-BE49-F238E27FC236}">
+                <a16:creationId xmlns:a16="http://schemas.microsoft.com/office/drawing/2014/main" id="{0118D976-084E-81DE-A430-7E928934C63E}"/>
+              </a:ext>
+            </a:extLst>
+          </p:cNvPr>
+          <p:cNvCxnSpPr>
+            <a:cxnSpLocks/>
+          </p:cNvCxnSpPr>
+          <p:nvPr/>
+        </p:nvCxnSpPr>
+        <p:spPr>
+          <a:xfrm>
+            <a:off x="2490788" y="3157538"/>
+            <a:ext cx="1221581" cy="108346"/>
+          </a:xfrm>
+          <a:prstGeom prst="line">
+            <a:avLst/>
+          </a:prstGeom>
+          <a:ln w="38100">
+            <a:solidFill>
+              <a:schemeClr val="tx1"/>
+            </a:solidFill>
+          </a:ln>
+        </p:spPr>
+        <p:style>
+          <a:lnRef idx="2">
+            <a:schemeClr val="accent1"/>
+          </a:lnRef>
+          <a:fillRef idx="0">
+            <a:schemeClr val="accent1"/>
+          </a:fillRef>
+          <a:effectRef idx="1">
+            <a:schemeClr val="accent1"/>
+          </a:effectRef>
+          <a:fontRef idx="minor">
+            <a:schemeClr val="tx1"/>
+          </a:fontRef>
+        </p:style>
+      </p:cxnSp>
+      <p:cxnSp>
+        <p:nvCxnSpPr>
+          <p:cNvPr id="56" name="Straight Connector 55">
+            <a:extLst>
+              <a:ext uri="{FF2B5EF4-FFF2-40B4-BE49-F238E27FC236}">
+                <a16:creationId xmlns:a16="http://schemas.microsoft.com/office/drawing/2014/main" id="{A798AE6A-C71F-B98F-52EB-27170B7CB552}"/>
+              </a:ext>
+            </a:extLst>
+          </p:cNvPr>
+          <p:cNvCxnSpPr>
+            <a:cxnSpLocks/>
+          </p:cNvCxnSpPr>
+          <p:nvPr/>
+        </p:nvCxnSpPr>
+        <p:spPr>
+          <a:xfrm>
+            <a:off x="2490788" y="3086581"/>
+            <a:ext cx="1221581" cy="108346"/>
+          </a:xfrm>
+          <a:prstGeom prst="line">
+            <a:avLst/>
+          </a:prstGeom>
+          <a:ln w="38100">
+            <a:solidFill>
+              <a:schemeClr val="tx1"/>
+            </a:solidFill>
+          </a:ln>
+        </p:spPr>
+        <p:style>
+          <a:lnRef idx="2">
+            <a:schemeClr val="accent1"/>
+          </a:lnRef>
+          <a:fillRef idx="0">
+            <a:schemeClr val="accent1"/>
+          </a:fillRef>
+          <a:effectRef idx="1">
+            <a:schemeClr val="accent1"/>
+          </a:effectRef>
+          <a:fontRef idx="minor">
+            <a:schemeClr val="tx1"/>
+          </a:fontRef>
+        </p:style>
+      </p:cxnSp>
+      <p:cxnSp>
+        <p:nvCxnSpPr>
+          <p:cNvPr id="57" name="Straight Connector 56">
+            <a:extLst>
+              <a:ext uri="{FF2B5EF4-FFF2-40B4-BE49-F238E27FC236}">
+                <a16:creationId xmlns:a16="http://schemas.microsoft.com/office/drawing/2014/main" id="{2A5913C6-AE93-2ABA-668E-1ADAD4320176}"/>
+              </a:ext>
+            </a:extLst>
+          </p:cNvPr>
+          <p:cNvCxnSpPr>
+            <a:cxnSpLocks/>
+          </p:cNvCxnSpPr>
+          <p:nvPr/>
+        </p:nvCxnSpPr>
+        <p:spPr>
+          <a:xfrm>
+            <a:off x="2490788" y="2447950"/>
+            <a:ext cx="1221581" cy="108346"/>
+          </a:xfrm>
+          <a:prstGeom prst="line">
+            <a:avLst/>
+          </a:prstGeom>
+          <a:ln w="38100">
+            <a:solidFill>
+              <a:schemeClr val="tx1"/>
+            </a:solidFill>
+          </a:ln>
+        </p:spPr>
+        <p:style>
+          <a:lnRef idx="2">
+            <a:schemeClr val="accent1"/>
+          </a:lnRef>
+          <a:fillRef idx="0">
+            <a:schemeClr val="accent1"/>
+          </a:fillRef>
+          <a:effectRef idx="1">
+            <a:schemeClr val="accent1"/>
+          </a:effectRef>
+          <a:fontRef idx="minor">
+            <a:schemeClr val="tx1"/>
+          </a:fontRef>
+        </p:style>
+      </p:cxnSp>
+      <p:cxnSp>
+        <p:nvCxnSpPr>
+          <p:cNvPr id="58" name="Straight Connector 57">
+            <a:extLst>
+              <a:ext uri="{FF2B5EF4-FFF2-40B4-BE49-F238E27FC236}">
+                <a16:creationId xmlns:a16="http://schemas.microsoft.com/office/drawing/2014/main" id="{EBE93E48-E144-BE7A-79E7-82DB96193E8C}"/>
+              </a:ext>
+            </a:extLst>
+          </p:cNvPr>
+          <p:cNvCxnSpPr>
+            <a:cxnSpLocks/>
+          </p:cNvCxnSpPr>
+          <p:nvPr/>
+        </p:nvCxnSpPr>
+        <p:spPr>
+          <a:xfrm>
+            <a:off x="2490788" y="2518909"/>
+            <a:ext cx="1221581" cy="108346"/>
+          </a:xfrm>
+          <a:prstGeom prst="line">
+            <a:avLst/>
+          </a:prstGeom>
+          <a:ln w="38100">
+            <a:solidFill>
+              <a:schemeClr val="tx1"/>
+            </a:solidFill>
+          </a:ln>
+        </p:spPr>
+        <p:style>
+          <a:lnRef idx="2">
+            <a:schemeClr val="accent1"/>
+          </a:lnRef>
+          <a:fillRef idx="0">
+            <a:schemeClr val="accent1"/>
+          </a:fillRef>
+          <a:effectRef idx="1">
+            <a:schemeClr val="accent1"/>
+          </a:effectRef>
+          <a:fontRef idx="minor">
+            <a:schemeClr val="tx1"/>
+          </a:fontRef>
+        </p:style>
+      </p:cxnSp>
+      <p:cxnSp>
+        <p:nvCxnSpPr>
+          <p:cNvPr id="59" name="Straight Connector 58">
+            <a:extLst>
+              <a:ext uri="{FF2B5EF4-FFF2-40B4-BE49-F238E27FC236}">
+                <a16:creationId xmlns:a16="http://schemas.microsoft.com/office/drawing/2014/main" id="{21BCD663-D5BE-1B1D-F64E-261BFA934E69}"/>
+              </a:ext>
+            </a:extLst>
+          </p:cNvPr>
+          <p:cNvCxnSpPr>
+            <a:cxnSpLocks/>
+          </p:cNvCxnSpPr>
+          <p:nvPr/>
+        </p:nvCxnSpPr>
+        <p:spPr>
+          <a:xfrm>
+            <a:off x="2490788" y="2589868"/>
+            <a:ext cx="1221581" cy="108346"/>
+          </a:xfrm>
+          <a:prstGeom prst="line">
+            <a:avLst/>
+          </a:prstGeom>
+          <a:ln w="38100">
+            <a:solidFill>
+              <a:schemeClr val="tx1"/>
+            </a:solidFill>
+          </a:ln>
+        </p:spPr>
+        <p:style>
+          <a:lnRef idx="2">
+            <a:schemeClr val="accent1"/>
+          </a:lnRef>
+          <a:fillRef idx="0">
+            <a:schemeClr val="accent1"/>
+          </a:fillRef>
+          <a:effectRef idx="1">
+            <a:schemeClr val="accent1"/>
+          </a:effectRef>
+          <a:fontRef idx="minor">
+            <a:schemeClr val="tx1"/>
+          </a:fontRef>
+        </p:style>
+      </p:cxnSp>
+      <p:cxnSp>
+        <p:nvCxnSpPr>
+          <p:cNvPr id="60" name="Straight Connector 59">
+            <a:extLst>
+              <a:ext uri="{FF2B5EF4-FFF2-40B4-BE49-F238E27FC236}">
+                <a16:creationId xmlns:a16="http://schemas.microsoft.com/office/drawing/2014/main" id="{5ED8F629-6136-D10B-FC84-521F9DFFE635}"/>
+              </a:ext>
+            </a:extLst>
+          </p:cNvPr>
+          <p:cNvCxnSpPr>
+            <a:cxnSpLocks/>
+          </p:cNvCxnSpPr>
+          <p:nvPr/>
+        </p:nvCxnSpPr>
+        <p:spPr>
+          <a:xfrm>
+            <a:off x="2490788" y="2660827"/>
+            <a:ext cx="1221581" cy="108346"/>
+          </a:xfrm>
+          <a:prstGeom prst="line">
+            <a:avLst/>
+          </a:prstGeom>
+          <a:ln w="38100">
+            <a:solidFill>
+              <a:schemeClr val="tx1"/>
+            </a:solidFill>
+          </a:ln>
+        </p:spPr>
+        <p:style>
+          <a:lnRef idx="2">
+            <a:schemeClr val="accent1"/>
+          </a:lnRef>
+          <a:fillRef idx="0">
+            <a:schemeClr val="accent1"/>
+          </a:fillRef>
+          <a:effectRef idx="1">
+            <a:schemeClr val="accent1"/>
+          </a:effectRef>
+          <a:fontRef idx="minor">
+            <a:schemeClr val="tx1"/>
+          </a:fontRef>
+        </p:style>
+      </p:cxnSp>
+      <p:cxnSp>
+        <p:nvCxnSpPr>
+          <p:cNvPr id="61" name="Straight Connector 60">
+            <a:extLst>
+              <a:ext uri="{FF2B5EF4-FFF2-40B4-BE49-F238E27FC236}">
+                <a16:creationId xmlns:a16="http://schemas.microsoft.com/office/drawing/2014/main" id="{7C3D645A-CED4-34C4-610F-5EF3DD9D5F12}"/>
+              </a:ext>
+            </a:extLst>
+          </p:cNvPr>
+          <p:cNvCxnSpPr>
+            <a:cxnSpLocks/>
+          </p:cNvCxnSpPr>
+          <p:nvPr/>
+        </p:nvCxnSpPr>
+        <p:spPr>
+          <a:xfrm>
+            <a:off x="2490788" y="2731786"/>
+            <a:ext cx="1221581" cy="108346"/>
+          </a:xfrm>
+          <a:prstGeom prst="line">
+            <a:avLst/>
+          </a:prstGeom>
+          <a:ln w="38100">
+            <a:solidFill>
+              <a:schemeClr val="tx1"/>
+            </a:solidFill>
+          </a:ln>
+        </p:spPr>
+        <p:style>
+          <a:lnRef idx="2">
+            <a:schemeClr val="accent1"/>
+          </a:lnRef>
+          <a:fillRef idx="0">
+            <a:schemeClr val="accent1"/>
+          </a:fillRef>
+          <a:effectRef idx="1">
+            <a:schemeClr val="accent1"/>
+          </a:effectRef>
+          <a:fontRef idx="minor">
+            <a:schemeClr val="tx1"/>
+          </a:fontRef>
+        </p:style>
+      </p:cxnSp>
+      <p:cxnSp>
+        <p:nvCxnSpPr>
+          <p:cNvPr id="62" name="Straight Connector 61">
+            <a:extLst>
+              <a:ext uri="{FF2B5EF4-FFF2-40B4-BE49-F238E27FC236}">
+                <a16:creationId xmlns:a16="http://schemas.microsoft.com/office/drawing/2014/main" id="{6ED52C04-0DF0-C10F-7748-519F0D45630F}"/>
+              </a:ext>
+            </a:extLst>
+          </p:cNvPr>
+          <p:cNvCxnSpPr>
+            <a:cxnSpLocks/>
+          </p:cNvCxnSpPr>
+          <p:nvPr/>
+        </p:nvCxnSpPr>
+        <p:spPr>
+          <a:xfrm>
+            <a:off x="2490788" y="2802745"/>
+            <a:ext cx="1221581" cy="108346"/>
+          </a:xfrm>
+          <a:prstGeom prst="line">
+            <a:avLst/>
+          </a:prstGeom>
+          <a:ln w="38100">
+            <a:solidFill>
+              <a:schemeClr val="tx1"/>
+            </a:solidFill>
+          </a:ln>
+        </p:spPr>
+        <p:style>
+          <a:lnRef idx="2">
+            <a:schemeClr val="accent1"/>
+          </a:lnRef>
+          <a:fillRef idx="0">
+            <a:schemeClr val="accent1"/>
+          </a:fillRef>
+          <a:effectRef idx="1">
+            <a:schemeClr val="accent1"/>
+          </a:effectRef>
+          <a:fontRef idx="minor">
+            <a:schemeClr val="tx1"/>
+          </a:fontRef>
+        </p:style>
+      </p:cxnSp>
+      <p:cxnSp>
+        <p:nvCxnSpPr>
+          <p:cNvPr id="63" name="Straight Connector 62">
+            <a:extLst>
+              <a:ext uri="{FF2B5EF4-FFF2-40B4-BE49-F238E27FC236}">
+                <a16:creationId xmlns:a16="http://schemas.microsoft.com/office/drawing/2014/main" id="{4ED3BD94-98D2-7511-ED2D-F1152BC7C77E}"/>
+              </a:ext>
+            </a:extLst>
+          </p:cNvPr>
+          <p:cNvCxnSpPr>
+            <a:cxnSpLocks/>
+          </p:cNvCxnSpPr>
+          <p:nvPr/>
+        </p:nvCxnSpPr>
+        <p:spPr>
+          <a:xfrm>
+            <a:off x="2490788" y="2873704"/>
+            <a:ext cx="1221581" cy="108346"/>
+          </a:xfrm>
+          <a:prstGeom prst="line">
+            <a:avLst/>
+          </a:prstGeom>
+          <a:ln w="38100">
+            <a:solidFill>
+              <a:schemeClr val="tx1"/>
+            </a:solidFill>
+          </a:ln>
+        </p:spPr>
+        <p:style>
+          <a:lnRef idx="2">
+            <a:schemeClr val="accent1"/>
+          </a:lnRef>
+          <a:fillRef idx="0">
+            <a:schemeClr val="accent1"/>
+          </a:fillRef>
+          <a:effectRef idx="1">
+            <a:schemeClr val="accent1"/>
+          </a:effectRef>
+          <a:fontRef idx="minor">
+            <a:schemeClr val="tx1"/>
+          </a:fontRef>
+        </p:style>
+      </p:cxnSp>
+      <p:cxnSp>
+        <p:nvCxnSpPr>
+          <p:cNvPr id="64" name="Straight Connector 63">
+            <a:extLst>
+              <a:ext uri="{FF2B5EF4-FFF2-40B4-BE49-F238E27FC236}">
+                <a16:creationId xmlns:a16="http://schemas.microsoft.com/office/drawing/2014/main" id="{B6FD7A99-DF89-F98A-4707-0AA3C216CD96}"/>
+              </a:ext>
+            </a:extLst>
+          </p:cNvPr>
+          <p:cNvCxnSpPr>
+            <a:cxnSpLocks/>
+          </p:cNvCxnSpPr>
+          <p:nvPr/>
+        </p:nvCxnSpPr>
+        <p:spPr>
+          <a:xfrm>
+            <a:off x="2490788" y="2944663"/>
+            <a:ext cx="1221581" cy="108346"/>
+          </a:xfrm>
+          <a:prstGeom prst="line">
+            <a:avLst/>
+          </a:prstGeom>
+          <a:ln w="38100">
+            <a:solidFill>
+              <a:schemeClr val="tx1"/>
+            </a:solidFill>
+          </a:ln>
+        </p:spPr>
+        <p:style>
+          <a:lnRef idx="2">
+            <a:schemeClr val="accent1"/>
+          </a:lnRef>
+          <a:fillRef idx="0">
+            <a:schemeClr val="accent1"/>
+          </a:fillRef>
+          <a:effectRef idx="1">
+            <a:schemeClr val="accent1"/>
+          </a:effectRef>
+          <a:fontRef idx="minor">
+            <a:schemeClr val="tx1"/>
+          </a:fontRef>
+        </p:style>
+      </p:cxnSp>
+      <p:cxnSp>
+        <p:nvCxnSpPr>
+          <p:cNvPr id="65" name="Straight Connector 64">
+            <a:extLst>
+              <a:ext uri="{FF2B5EF4-FFF2-40B4-BE49-F238E27FC236}">
+                <a16:creationId xmlns:a16="http://schemas.microsoft.com/office/drawing/2014/main" id="{075EB5B5-9A89-ACF1-0637-E5D13989EFEA}"/>
+              </a:ext>
+            </a:extLst>
+          </p:cNvPr>
+          <p:cNvCxnSpPr>
+            <a:cxnSpLocks/>
+          </p:cNvCxnSpPr>
+          <p:nvPr/>
+        </p:nvCxnSpPr>
+        <p:spPr>
+          <a:xfrm>
+            <a:off x="2490788" y="3015622"/>
+            <a:ext cx="1221581" cy="108346"/>
+          </a:xfrm>
+          <a:prstGeom prst="line">
+            <a:avLst/>
+          </a:prstGeom>
+          <a:ln w="38100">
+            <a:solidFill>
+              <a:schemeClr val="tx1"/>
+            </a:solidFill>
+          </a:ln>
+        </p:spPr>
+        <p:style>
+          <a:lnRef idx="2">
+            <a:schemeClr val="accent1"/>
+          </a:lnRef>
+          <a:fillRef idx="0">
+            <a:schemeClr val="accent1"/>
+          </a:fillRef>
+          <a:effectRef idx="1">
+            <a:schemeClr val="accent1"/>
+          </a:effectRef>
+          <a:fontRef idx="minor">
+            <a:schemeClr val="tx1"/>
+          </a:fontRef>
+        </p:style>
+      </p:cxnSp>
+      <p:cxnSp>
+        <p:nvCxnSpPr>
+          <p:cNvPr id="66" name="Straight Connector 65">
+            <a:extLst>
+              <a:ext uri="{FF2B5EF4-FFF2-40B4-BE49-F238E27FC236}">
+                <a16:creationId xmlns:a16="http://schemas.microsoft.com/office/drawing/2014/main" id="{838F0204-375B-BF2E-CBBF-18B64E02FA64}"/>
+              </a:ext>
+            </a:extLst>
+          </p:cNvPr>
+          <p:cNvCxnSpPr>
+            <a:cxnSpLocks/>
+          </p:cNvCxnSpPr>
+          <p:nvPr/>
+        </p:nvCxnSpPr>
+        <p:spPr>
+          <a:xfrm flipH="1">
+            <a:off x="2490788" y="4372662"/>
+            <a:ext cx="1221581" cy="108346"/>
+          </a:xfrm>
+          <a:prstGeom prst="line">
+            <a:avLst/>
+          </a:prstGeom>
+          <a:ln w="38100">
+            <a:solidFill>
+              <a:schemeClr val="tx1"/>
+            </a:solidFill>
+          </a:ln>
+        </p:spPr>
+        <p:style>
+          <a:lnRef idx="2">
+            <a:schemeClr val="accent1"/>
+          </a:lnRef>
+          <a:fillRef idx="0">
+            <a:schemeClr val="accent1"/>
+          </a:fillRef>
+          <a:effectRef idx="1">
+            <a:schemeClr val="accent1"/>
+          </a:effectRef>
+          <a:fontRef idx="minor">
+            <a:schemeClr val="tx1"/>
+          </a:fontRef>
+        </p:style>
+      </p:cxnSp>
+      <p:cxnSp>
+        <p:nvCxnSpPr>
+          <p:cNvPr id="67" name="Straight Connector 66">
+            <a:extLst>
+              <a:ext uri="{FF2B5EF4-FFF2-40B4-BE49-F238E27FC236}">
+                <a16:creationId xmlns:a16="http://schemas.microsoft.com/office/drawing/2014/main" id="{BD535CC2-284A-C726-4A77-5849FB7D0542}"/>
+              </a:ext>
+            </a:extLst>
+          </p:cNvPr>
+          <p:cNvCxnSpPr>
+            <a:cxnSpLocks/>
+          </p:cNvCxnSpPr>
+          <p:nvPr/>
+        </p:nvCxnSpPr>
+        <p:spPr>
+          <a:xfrm flipH="1">
+            <a:off x="2490788" y="4301705"/>
+            <a:ext cx="1221581" cy="108346"/>
+          </a:xfrm>
+          <a:prstGeom prst="line">
+            <a:avLst/>
+          </a:prstGeom>
+          <a:ln w="38100">
+            <a:solidFill>
+              <a:schemeClr val="tx1"/>
+            </a:solidFill>
+          </a:ln>
+        </p:spPr>
+        <p:style>
+          <a:lnRef idx="2">
+            <a:schemeClr val="accent1"/>
+          </a:lnRef>
+          <a:fillRef idx="0">
+            <a:schemeClr val="accent1"/>
+          </a:fillRef>
+          <a:effectRef idx="1">
+            <a:schemeClr val="accent1"/>
+          </a:effectRef>
+          <a:fontRef idx="minor">
+            <a:schemeClr val="tx1"/>
+          </a:fontRef>
+        </p:style>
+      </p:cxnSp>
+      <p:cxnSp>
+        <p:nvCxnSpPr>
+          <p:cNvPr id="68" name="Straight Connector 67">
+            <a:extLst>
+              <a:ext uri="{FF2B5EF4-FFF2-40B4-BE49-F238E27FC236}">
+                <a16:creationId xmlns:a16="http://schemas.microsoft.com/office/drawing/2014/main" id="{91AB4DF7-4B12-FA55-49F0-D5528C3EB0EF}"/>
+              </a:ext>
+            </a:extLst>
+          </p:cNvPr>
+          <p:cNvCxnSpPr>
+            <a:cxnSpLocks/>
+          </p:cNvCxnSpPr>
+          <p:nvPr/>
+        </p:nvCxnSpPr>
+        <p:spPr>
+          <a:xfrm flipH="1">
+            <a:off x="2490788" y="3663074"/>
+            <a:ext cx="1221581" cy="108346"/>
+          </a:xfrm>
+          <a:prstGeom prst="line">
+            <a:avLst/>
+          </a:prstGeom>
+          <a:ln w="38100">
+            <a:solidFill>
+              <a:schemeClr val="tx1"/>
+            </a:solidFill>
+          </a:ln>
+        </p:spPr>
+        <p:style>
+          <a:lnRef idx="2">
+            <a:schemeClr val="accent1"/>
+          </a:lnRef>
+          <a:fillRef idx="0">
+            <a:schemeClr val="accent1"/>
+          </a:fillRef>
+          <a:effectRef idx="1">
+            <a:schemeClr val="accent1"/>
+          </a:effectRef>
+          <a:fontRef idx="minor">
+            <a:schemeClr val="tx1"/>
+          </a:fontRef>
+        </p:style>
+      </p:cxnSp>
+      <p:cxnSp>
+        <p:nvCxnSpPr>
+          <p:cNvPr id="69" name="Straight Connector 68">
+            <a:extLst>
+              <a:ext uri="{FF2B5EF4-FFF2-40B4-BE49-F238E27FC236}">
+                <a16:creationId xmlns:a16="http://schemas.microsoft.com/office/drawing/2014/main" id="{1A56D2F1-3621-AA50-38E6-DB0A3637B151}"/>
+              </a:ext>
+            </a:extLst>
+          </p:cNvPr>
+          <p:cNvCxnSpPr>
+            <a:cxnSpLocks/>
+          </p:cNvCxnSpPr>
+          <p:nvPr/>
+        </p:nvCxnSpPr>
+        <p:spPr>
+          <a:xfrm flipH="1">
+            <a:off x="2490788" y="3734033"/>
+            <a:ext cx="1221581" cy="108346"/>
+          </a:xfrm>
+          <a:prstGeom prst="line">
+            <a:avLst/>
+          </a:prstGeom>
+          <a:ln w="38100">
+            <a:solidFill>
+              <a:schemeClr val="tx1"/>
+            </a:solidFill>
+          </a:ln>
+        </p:spPr>
+        <p:style>
+          <a:lnRef idx="2">
+            <a:schemeClr val="accent1"/>
+          </a:lnRef>
+          <a:fillRef idx="0">
+            <a:schemeClr val="accent1"/>
+          </a:fillRef>
+          <a:effectRef idx="1">
+            <a:schemeClr val="accent1"/>
+          </a:effectRef>
+          <a:fontRef idx="minor">
+            <a:schemeClr val="tx1"/>
+          </a:fontRef>
+        </p:style>
+      </p:cxnSp>
+      <p:cxnSp>
+        <p:nvCxnSpPr>
+          <p:cNvPr id="70" name="Straight Connector 69">
+            <a:extLst>
+              <a:ext uri="{FF2B5EF4-FFF2-40B4-BE49-F238E27FC236}">
+                <a16:creationId xmlns:a16="http://schemas.microsoft.com/office/drawing/2014/main" id="{4418AC48-2857-8774-E8B3-958CFB3AB1E1}"/>
+              </a:ext>
+            </a:extLst>
+          </p:cNvPr>
+          <p:cNvCxnSpPr>
+            <a:cxnSpLocks/>
+          </p:cNvCxnSpPr>
+          <p:nvPr/>
+        </p:nvCxnSpPr>
+        <p:spPr>
+          <a:xfrm flipH="1">
+            <a:off x="2490788" y="3804992"/>
+            <a:ext cx="1221581" cy="108346"/>
+          </a:xfrm>
+          <a:prstGeom prst="line">
+            <a:avLst/>
+          </a:prstGeom>
+          <a:ln w="38100">
+            <a:solidFill>
+              <a:schemeClr val="tx1"/>
+            </a:solidFill>
+          </a:ln>
+        </p:spPr>
+        <p:style>
+          <a:lnRef idx="2">
+            <a:schemeClr val="accent1"/>
+          </a:lnRef>
+          <a:fillRef idx="0">
+            <a:schemeClr val="accent1"/>
+          </a:fillRef>
+          <a:effectRef idx="1">
+            <a:schemeClr val="accent1"/>
+          </a:effectRef>
+          <a:fontRef idx="minor">
+            <a:schemeClr val="tx1"/>
+          </a:fontRef>
+        </p:style>
+      </p:cxnSp>
+      <p:cxnSp>
+        <p:nvCxnSpPr>
+          <p:cNvPr id="71" name="Straight Connector 70">
+            <a:extLst>
+              <a:ext uri="{FF2B5EF4-FFF2-40B4-BE49-F238E27FC236}">
+                <a16:creationId xmlns:a16="http://schemas.microsoft.com/office/drawing/2014/main" id="{EDC4D0A1-1BA4-4603-635B-829144BF6B89}"/>
+              </a:ext>
+            </a:extLst>
+          </p:cNvPr>
+          <p:cNvCxnSpPr>
+            <a:cxnSpLocks/>
+          </p:cNvCxnSpPr>
+          <p:nvPr/>
+        </p:nvCxnSpPr>
+        <p:spPr>
+          <a:xfrm flipH="1">
+            <a:off x="2490788" y="3875951"/>
+            <a:ext cx="1221581" cy="108346"/>
+          </a:xfrm>
+          <a:prstGeom prst="line">
+            <a:avLst/>
+          </a:prstGeom>
+          <a:ln w="38100">
+            <a:solidFill>
+              <a:schemeClr val="tx1"/>
+            </a:solidFill>
+          </a:ln>
+        </p:spPr>
+        <p:style>
+          <a:lnRef idx="2">
+            <a:schemeClr val="accent1"/>
+          </a:lnRef>
+          <a:fillRef idx="0">
+            <a:schemeClr val="accent1"/>
+          </a:fillRef>
+          <a:effectRef idx="1">
+            <a:schemeClr val="accent1"/>
+          </a:effectRef>
+          <a:fontRef idx="minor">
+            <a:schemeClr val="tx1"/>
+          </a:fontRef>
+        </p:style>
+      </p:cxnSp>
+      <p:cxnSp>
+        <p:nvCxnSpPr>
+          <p:cNvPr id="72" name="Straight Connector 71">
+            <a:extLst>
+              <a:ext uri="{FF2B5EF4-FFF2-40B4-BE49-F238E27FC236}">
+                <a16:creationId xmlns:a16="http://schemas.microsoft.com/office/drawing/2014/main" id="{D8A7E31F-6CF1-FE60-25EA-086B31F18095}"/>
+              </a:ext>
+            </a:extLst>
+          </p:cNvPr>
+          <p:cNvCxnSpPr>
+            <a:cxnSpLocks/>
+          </p:cNvCxnSpPr>
+          <p:nvPr/>
+        </p:nvCxnSpPr>
+        <p:spPr>
+          <a:xfrm flipH="1">
+            <a:off x="2490788" y="3946910"/>
+            <a:ext cx="1221581" cy="108346"/>
+          </a:xfrm>
+          <a:prstGeom prst="line">
+            <a:avLst/>
+          </a:prstGeom>
+          <a:ln w="38100">
+            <a:solidFill>
+              <a:schemeClr val="tx1"/>
+            </a:solidFill>
+          </a:ln>
+        </p:spPr>
+        <p:style>
+          <a:lnRef idx="2">
+            <a:schemeClr val="accent1"/>
+          </a:lnRef>
+          <a:fillRef idx="0">
+            <a:schemeClr val="accent1"/>
+          </a:fillRef>
+          <a:effectRef idx="1">
+            <a:schemeClr val="accent1"/>
+          </a:effectRef>
+          <a:fontRef idx="minor">
+            <a:schemeClr val="tx1"/>
+          </a:fontRef>
+        </p:style>
+      </p:cxnSp>
+      <p:cxnSp>
+        <p:nvCxnSpPr>
+          <p:cNvPr id="73" name="Straight Connector 72">
+            <a:extLst>
+              <a:ext uri="{FF2B5EF4-FFF2-40B4-BE49-F238E27FC236}">
+                <a16:creationId xmlns:a16="http://schemas.microsoft.com/office/drawing/2014/main" id="{5EB1D01A-FBB3-2223-361E-2EDC9DC8FA68}"/>
+              </a:ext>
+            </a:extLst>
+          </p:cNvPr>
+          <p:cNvCxnSpPr>
+            <a:cxnSpLocks/>
+          </p:cNvCxnSpPr>
+          <p:nvPr/>
+        </p:nvCxnSpPr>
+        <p:spPr>
+          <a:xfrm flipH="1">
+            <a:off x="2490788" y="4017869"/>
+            <a:ext cx="1221581" cy="108346"/>
+          </a:xfrm>
+          <a:prstGeom prst="line">
+            <a:avLst/>
+          </a:prstGeom>
+          <a:ln w="38100">
+            <a:solidFill>
+              <a:schemeClr val="tx1"/>
+            </a:solidFill>
+          </a:ln>
+        </p:spPr>
+        <p:style>
+          <a:lnRef idx="2">
+            <a:schemeClr val="accent1"/>
+          </a:lnRef>
+          <a:fillRef idx="0">
+            <a:schemeClr val="accent1"/>
+          </a:fillRef>
+          <a:effectRef idx="1">
+            <a:schemeClr val="accent1"/>
+          </a:effectRef>
+          <a:fontRef idx="minor">
+            <a:schemeClr val="tx1"/>
+          </a:fontRef>
+        </p:style>
+      </p:cxnSp>
+      <p:cxnSp>
+        <p:nvCxnSpPr>
+          <p:cNvPr id="74" name="Straight Connector 73">
+            <a:extLst>
+              <a:ext uri="{FF2B5EF4-FFF2-40B4-BE49-F238E27FC236}">
+                <a16:creationId xmlns:a16="http://schemas.microsoft.com/office/drawing/2014/main" id="{D4A1BF47-6F12-B7A5-B9B5-ED95790491FE}"/>
+              </a:ext>
+            </a:extLst>
+          </p:cNvPr>
+          <p:cNvCxnSpPr>
+            <a:cxnSpLocks/>
+          </p:cNvCxnSpPr>
+          <p:nvPr/>
+        </p:nvCxnSpPr>
+        <p:spPr>
+          <a:xfrm flipH="1">
+            <a:off x="2490788" y="4088828"/>
+            <a:ext cx="1221581" cy="108346"/>
+          </a:xfrm>
+          <a:prstGeom prst="line">
+            <a:avLst/>
+          </a:prstGeom>
+          <a:ln w="38100">
+            <a:solidFill>
+              <a:schemeClr val="tx1"/>
+            </a:solidFill>
+          </a:ln>
+        </p:spPr>
+        <p:style>
+          <a:lnRef idx="2">
+            <a:schemeClr val="accent1"/>
+          </a:lnRef>
+          <a:fillRef idx="0">
+            <a:schemeClr val="accent1"/>
+          </a:fillRef>
+          <a:effectRef idx="1">
+            <a:schemeClr val="accent1"/>
+          </a:effectRef>
+          <a:fontRef idx="minor">
+            <a:schemeClr val="tx1"/>
+          </a:fontRef>
+        </p:style>
+      </p:cxnSp>
+      <p:cxnSp>
+        <p:nvCxnSpPr>
+          <p:cNvPr id="75" name="Straight Connector 74">
+            <a:extLst>
+              <a:ext uri="{FF2B5EF4-FFF2-40B4-BE49-F238E27FC236}">
+                <a16:creationId xmlns:a16="http://schemas.microsoft.com/office/drawing/2014/main" id="{407F990F-A684-265F-AC59-11C98B2A38DE}"/>
+              </a:ext>
+            </a:extLst>
+          </p:cNvPr>
+          <p:cNvCxnSpPr>
+            <a:cxnSpLocks/>
+          </p:cNvCxnSpPr>
+          <p:nvPr/>
+        </p:nvCxnSpPr>
+        <p:spPr>
+          <a:xfrm flipH="1">
+            <a:off x="2490788" y="4159787"/>
+            <a:ext cx="1221581" cy="108346"/>
+          </a:xfrm>
+          <a:prstGeom prst="line">
+            <a:avLst/>
+          </a:prstGeom>
+          <a:ln w="38100">
+            <a:solidFill>
+              <a:schemeClr val="tx1"/>
+            </a:solidFill>
+          </a:ln>
+        </p:spPr>
+        <p:style>
+          <a:lnRef idx="2">
+            <a:schemeClr val="accent1"/>
+          </a:lnRef>
+          <a:fillRef idx="0">
+            <a:schemeClr val="accent1"/>
+          </a:fillRef>
+          <a:effectRef idx="1">
+            <a:schemeClr val="accent1"/>
+          </a:effectRef>
+          <a:fontRef idx="minor">
+            <a:schemeClr val="tx1"/>
+          </a:fontRef>
+        </p:style>
+      </p:cxnSp>
+      <p:cxnSp>
+        <p:nvCxnSpPr>
+          <p:cNvPr id="76" name="Straight Connector 75">
+            <a:extLst>
+              <a:ext uri="{FF2B5EF4-FFF2-40B4-BE49-F238E27FC236}">
+                <a16:creationId xmlns:a16="http://schemas.microsoft.com/office/drawing/2014/main" id="{336B5272-0ACC-5E02-AE9D-50FCBE8277EA}"/>
+              </a:ext>
+            </a:extLst>
+          </p:cNvPr>
+          <p:cNvCxnSpPr>
+            <a:cxnSpLocks/>
+          </p:cNvCxnSpPr>
+          <p:nvPr/>
+        </p:nvCxnSpPr>
+        <p:spPr>
+          <a:xfrm flipH="1">
+            <a:off x="2490788" y="4230746"/>
+            <a:ext cx="1221581" cy="108346"/>
+          </a:xfrm>
+          <a:prstGeom prst="line">
+            <a:avLst/>
+          </a:prstGeom>
+          <a:ln w="38100">
+            <a:solidFill>
+              <a:schemeClr val="tx1"/>
+            </a:solidFill>
+          </a:ln>
+        </p:spPr>
+        <p:style>
+          <a:lnRef idx="2">
+            <a:schemeClr val="accent1"/>
+          </a:lnRef>
+          <a:fillRef idx="0">
+            <a:schemeClr val="accent1"/>
+          </a:fillRef>
+          <a:effectRef idx="1">
+            <a:schemeClr val="accent1"/>
+          </a:effectRef>
+          <a:fontRef idx="minor">
+            <a:schemeClr val="tx1"/>
+          </a:fontRef>
+        </p:style>
+      </p:cxnSp>
+      <p:cxnSp>
+        <p:nvCxnSpPr>
+          <p:cNvPr id="77" name="Straight Connector 76">
+            <a:extLst>
+              <a:ext uri="{FF2B5EF4-FFF2-40B4-BE49-F238E27FC236}">
+                <a16:creationId xmlns:a16="http://schemas.microsoft.com/office/drawing/2014/main" id="{65D5233D-48BE-6F83-9A10-CA1DC4DBDFCA}"/>
+              </a:ext>
+            </a:extLst>
+          </p:cNvPr>
+          <p:cNvCxnSpPr>
+            <a:cxnSpLocks/>
+          </p:cNvCxnSpPr>
+          <p:nvPr/>
+        </p:nvCxnSpPr>
+        <p:spPr>
+          <a:xfrm>
+            <a:off x="359570" y="2436021"/>
+            <a:ext cx="778669" cy="197189"/>
+          </a:xfrm>
+          <a:prstGeom prst="line">
+            <a:avLst/>
+          </a:prstGeom>
+          <a:ln w="38100">
+            <a:solidFill>
+              <a:schemeClr val="tx1"/>
+            </a:solidFill>
+          </a:ln>
+        </p:spPr>
+        <p:style>
+          <a:lnRef idx="2">
+            <a:schemeClr val="accent1"/>
+          </a:lnRef>
+          <a:fillRef idx="0">
+            <a:schemeClr val="accent1"/>
+          </a:fillRef>
+          <a:effectRef idx="1">
+            <a:schemeClr val="accent1"/>
+          </a:effectRef>
+          <a:fontRef idx="minor">
+            <a:schemeClr val="tx1"/>
+          </a:fontRef>
+        </p:style>
+      </p:cxnSp>
+      <p:cxnSp>
+        <p:nvCxnSpPr>
+          <p:cNvPr id="84" name="Straight Connector 83">
+            <a:extLst>
+              <a:ext uri="{FF2B5EF4-FFF2-40B4-BE49-F238E27FC236}">
+                <a16:creationId xmlns:a16="http://schemas.microsoft.com/office/drawing/2014/main" id="{FF62EEFE-0594-C9F5-3CB5-7272BBC5C0F7}"/>
+              </a:ext>
+            </a:extLst>
+          </p:cNvPr>
+          <p:cNvCxnSpPr>
+            <a:cxnSpLocks/>
+          </p:cNvCxnSpPr>
+          <p:nvPr/>
+        </p:nvCxnSpPr>
+        <p:spPr>
+          <a:xfrm>
+            <a:off x="426244" y="2649996"/>
+            <a:ext cx="711995" cy="186339"/>
+          </a:xfrm>
+          <a:prstGeom prst="line">
+            <a:avLst/>
+          </a:prstGeom>
+          <a:ln w="38100">
+            <a:solidFill>
+              <a:schemeClr val="tx1"/>
+            </a:solidFill>
+          </a:ln>
+        </p:spPr>
+        <p:style>
+          <a:lnRef idx="2">
+            <a:schemeClr val="accent1"/>
+          </a:lnRef>
+          <a:fillRef idx="0">
+            <a:schemeClr val="accent1"/>
+          </a:fillRef>
+          <a:effectRef idx="1">
+            <a:schemeClr val="accent1"/>
+          </a:effectRef>
+          <a:fontRef idx="minor">
+            <a:schemeClr val="tx1"/>
+          </a:fontRef>
+        </p:style>
+      </p:cxnSp>
+      <p:cxnSp>
+        <p:nvCxnSpPr>
+          <p:cNvPr id="90" name="Straight Connector 89">
+            <a:extLst>
+              <a:ext uri="{FF2B5EF4-FFF2-40B4-BE49-F238E27FC236}">
+                <a16:creationId xmlns:a16="http://schemas.microsoft.com/office/drawing/2014/main" id="{559AF521-1376-E231-9324-7720A846A6B7}"/>
+              </a:ext>
+            </a:extLst>
+          </p:cNvPr>
+          <p:cNvCxnSpPr>
+            <a:cxnSpLocks/>
+          </p:cNvCxnSpPr>
+          <p:nvPr/>
+        </p:nvCxnSpPr>
+        <p:spPr>
+          <a:xfrm>
+            <a:off x="426244" y="2851493"/>
+            <a:ext cx="711995" cy="186339"/>
+          </a:xfrm>
+          <a:prstGeom prst="line">
+            <a:avLst/>
+          </a:prstGeom>
+          <a:ln w="38100">
+            <a:solidFill>
+              <a:schemeClr val="tx1"/>
+            </a:solidFill>
+          </a:ln>
+        </p:spPr>
+        <p:style>
+          <a:lnRef idx="2">
+            <a:schemeClr val="accent1"/>
+          </a:lnRef>
+          <a:fillRef idx="0">
+            <a:schemeClr val="accent1"/>
+          </a:fillRef>
+          <a:effectRef idx="1">
+            <a:schemeClr val="accent1"/>
+          </a:effectRef>
+          <a:fontRef idx="minor">
+            <a:schemeClr val="tx1"/>
+          </a:fontRef>
+        </p:style>
+      </p:cxnSp>
+      <p:cxnSp>
+        <p:nvCxnSpPr>
+          <p:cNvPr id="91" name="Straight Connector 90">
+            <a:extLst>
+              <a:ext uri="{FF2B5EF4-FFF2-40B4-BE49-F238E27FC236}">
+                <a16:creationId xmlns:a16="http://schemas.microsoft.com/office/drawing/2014/main" id="{058F8C8B-9FDF-4B27-49C4-645087F7514A}"/>
+              </a:ext>
+            </a:extLst>
+          </p:cNvPr>
+          <p:cNvCxnSpPr>
+            <a:cxnSpLocks/>
+          </p:cNvCxnSpPr>
+          <p:nvPr/>
+        </p:nvCxnSpPr>
+        <p:spPr>
+          <a:xfrm>
+            <a:off x="426244" y="3064368"/>
+            <a:ext cx="711995" cy="186339"/>
+          </a:xfrm>
+          <a:prstGeom prst="line">
+            <a:avLst/>
+          </a:prstGeom>
+          <a:ln w="38100">
+            <a:solidFill>
+              <a:schemeClr val="tx1"/>
+            </a:solidFill>
+          </a:ln>
+        </p:spPr>
+        <p:style>
+          <a:lnRef idx="2">
+            <a:schemeClr val="accent1"/>
+          </a:lnRef>
+          <a:fillRef idx="0">
+            <a:schemeClr val="accent1"/>
+          </a:fillRef>
+          <a:effectRef idx="1">
+            <a:schemeClr val="accent1"/>
+          </a:effectRef>
+          <a:fontRef idx="minor">
+            <a:schemeClr val="tx1"/>
+          </a:fontRef>
+        </p:style>
+      </p:cxnSp>
+      <p:cxnSp>
+        <p:nvCxnSpPr>
+          <p:cNvPr id="93" name="Straight Connector 92">
+            <a:extLst>
+              <a:ext uri="{FF2B5EF4-FFF2-40B4-BE49-F238E27FC236}">
+                <a16:creationId xmlns:a16="http://schemas.microsoft.com/office/drawing/2014/main" id="{B7E5B6E6-0C65-467D-876B-CB2FBD46DE25}"/>
+              </a:ext>
+            </a:extLst>
+          </p:cNvPr>
+          <p:cNvCxnSpPr>
+            <a:cxnSpLocks/>
+          </p:cNvCxnSpPr>
+          <p:nvPr/>
+        </p:nvCxnSpPr>
+        <p:spPr>
+          <a:xfrm>
+            <a:off x="426244" y="3886800"/>
+            <a:ext cx="711995" cy="186339"/>
+          </a:xfrm>
+          <a:prstGeom prst="line">
+            <a:avLst/>
+          </a:prstGeom>
+          <a:ln w="38100">
+            <a:solidFill>
+              <a:schemeClr val="tx1"/>
+            </a:solidFill>
+          </a:ln>
+        </p:spPr>
+        <p:style>
+          <a:lnRef idx="2">
+            <a:schemeClr val="accent1"/>
+          </a:lnRef>
+          <a:fillRef idx="0">
+            <a:schemeClr val="accent1"/>
+          </a:fillRef>
+          <a:effectRef idx="1">
+            <a:schemeClr val="accent1"/>
+          </a:effectRef>
+          <a:fontRef idx="minor">
+            <a:schemeClr val="tx1"/>
+          </a:fontRef>
+        </p:style>
+      </p:cxnSp>
+      <p:cxnSp>
+        <p:nvCxnSpPr>
+          <p:cNvPr id="94" name="Straight Connector 93">
+            <a:extLst>
+              <a:ext uri="{FF2B5EF4-FFF2-40B4-BE49-F238E27FC236}">
+                <a16:creationId xmlns:a16="http://schemas.microsoft.com/office/drawing/2014/main" id="{D37B9A5A-567E-2D1D-0F8E-E04284768B85}"/>
+              </a:ext>
+            </a:extLst>
+          </p:cNvPr>
+          <p:cNvCxnSpPr>
+            <a:cxnSpLocks/>
+          </p:cNvCxnSpPr>
+          <p:nvPr/>
+        </p:nvCxnSpPr>
+        <p:spPr>
+          <a:xfrm>
+            <a:off x="426244" y="4088297"/>
+            <a:ext cx="711995" cy="186339"/>
+          </a:xfrm>
+          <a:prstGeom prst="line">
+            <a:avLst/>
+          </a:prstGeom>
+          <a:ln w="38100">
+            <a:solidFill>
+              <a:schemeClr val="tx1"/>
+            </a:solidFill>
+          </a:ln>
+        </p:spPr>
+        <p:style>
+          <a:lnRef idx="2">
+            <a:schemeClr val="accent1"/>
+          </a:lnRef>
+          <a:fillRef idx="0">
+            <a:schemeClr val="accent1"/>
+          </a:fillRef>
+          <a:effectRef idx="1">
+            <a:schemeClr val="accent1"/>
+          </a:effectRef>
+          <a:fontRef idx="minor">
+            <a:schemeClr val="tx1"/>
+          </a:fontRef>
+        </p:style>
+      </p:cxnSp>
+      <p:cxnSp>
+        <p:nvCxnSpPr>
+          <p:cNvPr id="95" name="Straight Connector 94">
+            <a:extLst>
+              <a:ext uri="{FF2B5EF4-FFF2-40B4-BE49-F238E27FC236}">
+                <a16:creationId xmlns:a16="http://schemas.microsoft.com/office/drawing/2014/main" id="{FA78D2E4-9CC9-9675-C4DD-6A86D252B60B}"/>
+              </a:ext>
+            </a:extLst>
+          </p:cNvPr>
+          <p:cNvCxnSpPr>
+            <a:cxnSpLocks/>
+          </p:cNvCxnSpPr>
+          <p:nvPr/>
+        </p:nvCxnSpPr>
+        <p:spPr>
+          <a:xfrm>
+            <a:off x="426244" y="4301172"/>
+            <a:ext cx="711995" cy="186339"/>
+          </a:xfrm>
+          <a:prstGeom prst="line">
+            <a:avLst/>
+          </a:prstGeom>
+          <a:ln w="38100">
+            <a:solidFill>
+              <a:schemeClr val="tx1"/>
+            </a:solidFill>
+          </a:ln>
+        </p:spPr>
+        <p:style>
+          <a:lnRef idx="2">
+            <a:schemeClr val="accent1"/>
+          </a:lnRef>
+          <a:fillRef idx="0">
+            <a:schemeClr val="accent1"/>
+          </a:fillRef>
+          <a:effectRef idx="1">
+            <a:schemeClr val="accent1"/>
+          </a:effectRef>
+          <a:fontRef idx="minor">
+            <a:schemeClr val="tx1"/>
+          </a:fontRef>
+        </p:style>
+      </p:cxnSp>
+      <p:cxnSp>
+        <p:nvCxnSpPr>
+          <p:cNvPr id="96" name="Straight Connector 95">
+            <a:extLst>
+              <a:ext uri="{FF2B5EF4-FFF2-40B4-BE49-F238E27FC236}">
+                <a16:creationId xmlns:a16="http://schemas.microsoft.com/office/drawing/2014/main" id="{7BF5F9B2-0114-E8A8-C90E-5528C2218A1B}"/>
+              </a:ext>
+            </a:extLst>
+          </p:cNvPr>
+          <p:cNvCxnSpPr>
+            <a:cxnSpLocks/>
+          </p:cNvCxnSpPr>
+          <p:nvPr/>
+        </p:nvCxnSpPr>
+        <p:spPr>
+          <a:xfrm>
+            <a:off x="426243" y="3685303"/>
+            <a:ext cx="711995" cy="186339"/>
+          </a:xfrm>
+          <a:prstGeom prst="line">
+            <a:avLst/>
+          </a:prstGeom>
+          <a:ln w="38100">
+            <a:solidFill>
+              <a:schemeClr val="tx1"/>
+            </a:solidFill>
+          </a:ln>
+        </p:spPr>
+        <p:style>
+          <a:lnRef idx="2">
+            <a:schemeClr val="accent1"/>
+          </a:lnRef>
+          <a:fillRef idx="0">
+            <a:schemeClr val="accent1"/>
+          </a:fillRef>
+          <a:effectRef idx="1">
+            <a:schemeClr val="accent1"/>
+          </a:effectRef>
+          <a:fontRef idx="minor">
+            <a:schemeClr val="tx1"/>
+          </a:fontRef>
+        </p:style>
+      </p:cxnSp>
+      <p:cxnSp>
+        <p:nvCxnSpPr>
+          <p:cNvPr id="97" name="Straight Connector 96">
+            <a:extLst>
+              <a:ext uri="{FF2B5EF4-FFF2-40B4-BE49-F238E27FC236}">
+                <a16:creationId xmlns:a16="http://schemas.microsoft.com/office/drawing/2014/main" id="{728B1766-99FB-9AF3-A184-BC43E3A3E485}"/>
+              </a:ext>
+            </a:extLst>
+          </p:cNvPr>
+          <p:cNvCxnSpPr>
+            <a:cxnSpLocks/>
+            <a:stCxn id="152" idx="6"/>
+          </p:cNvCxnSpPr>
+          <p:nvPr/>
+        </p:nvCxnSpPr>
+        <p:spPr>
+          <a:xfrm>
+            <a:off x="-303313" y="3681521"/>
+            <a:ext cx="746705" cy="209"/>
+          </a:xfrm>
+          <a:prstGeom prst="line">
+            <a:avLst/>
+          </a:prstGeom>
+          <a:ln w="38100">
+            <a:solidFill>
+              <a:schemeClr val="tx1"/>
+            </a:solidFill>
+          </a:ln>
+        </p:spPr>
+        <p:style>
+          <a:lnRef idx="2">
+            <a:schemeClr val="accent1"/>
+          </a:lnRef>
+          <a:fillRef idx="0">
+            <a:schemeClr val="accent1"/>
+          </a:fillRef>
+          <a:effectRef idx="1">
+            <a:schemeClr val="accent1"/>
+          </a:effectRef>
+          <a:fontRef idx="minor">
+            <a:schemeClr val="tx1"/>
+          </a:fontRef>
+        </p:style>
+      </p:cxnSp>
+      <p:cxnSp>
+        <p:nvCxnSpPr>
+          <p:cNvPr id="104" name="Straight Connector 103">
+            <a:extLst>
+              <a:ext uri="{FF2B5EF4-FFF2-40B4-BE49-F238E27FC236}">
+                <a16:creationId xmlns:a16="http://schemas.microsoft.com/office/drawing/2014/main" id="{5227BDA3-B16F-E226-AADA-076ACD9734A9}"/>
+              </a:ext>
+            </a:extLst>
+          </p:cNvPr>
+          <p:cNvCxnSpPr>
+            <a:cxnSpLocks/>
+            <a:endCxn id="154" idx="6"/>
+          </p:cNvCxnSpPr>
+          <p:nvPr/>
+        </p:nvCxnSpPr>
+        <p:spPr>
+          <a:xfrm flipH="1" flipV="1">
+            <a:off x="-303314" y="3231138"/>
+            <a:ext cx="746706" cy="1409"/>
+          </a:xfrm>
+          <a:prstGeom prst="line">
+            <a:avLst/>
+          </a:prstGeom>
+          <a:ln w="38100">
+            <a:solidFill>
+              <a:schemeClr val="tx1"/>
+            </a:solidFill>
+          </a:ln>
+        </p:spPr>
+        <p:style>
+          <a:lnRef idx="2">
+            <a:schemeClr val="accent1"/>
+          </a:lnRef>
+          <a:fillRef idx="0">
+            <a:schemeClr val="accent1"/>
+          </a:fillRef>
+          <a:effectRef idx="1">
+            <a:schemeClr val="accent1"/>
+          </a:effectRef>
+          <a:fontRef idx="minor">
+            <a:schemeClr val="tx1"/>
+          </a:fontRef>
+        </p:style>
+      </p:cxnSp>
+      <p:cxnSp>
+        <p:nvCxnSpPr>
+          <p:cNvPr id="105" name="Straight Connector 104">
+            <a:extLst>
+              <a:ext uri="{FF2B5EF4-FFF2-40B4-BE49-F238E27FC236}">
+                <a16:creationId xmlns:a16="http://schemas.microsoft.com/office/drawing/2014/main" id="{DD8BBB48-0AA3-3C51-9E1D-D436EBF24F10}"/>
+              </a:ext>
+            </a:extLst>
+          </p:cNvPr>
+          <p:cNvCxnSpPr>
+            <a:cxnSpLocks/>
+          </p:cNvCxnSpPr>
+          <p:nvPr/>
+        </p:nvCxnSpPr>
+        <p:spPr>
+          <a:xfrm flipH="1">
+            <a:off x="1901428" y="2447950"/>
+            <a:ext cx="623176" cy="0"/>
+          </a:xfrm>
+          <a:prstGeom prst="line">
+            <a:avLst/>
+          </a:prstGeom>
+          <a:ln w="38100">
+            <a:solidFill>
+              <a:schemeClr val="tx1"/>
+            </a:solidFill>
+          </a:ln>
+        </p:spPr>
+        <p:style>
+          <a:lnRef idx="2">
+            <a:schemeClr val="accent1"/>
+          </a:lnRef>
+          <a:fillRef idx="0">
+            <a:schemeClr val="accent1"/>
+          </a:fillRef>
+          <a:effectRef idx="1">
+            <a:schemeClr val="accent1"/>
+          </a:effectRef>
+          <a:fontRef idx="minor">
+            <a:schemeClr val="tx1"/>
+          </a:fontRef>
+        </p:style>
+      </p:cxnSp>
+      <p:cxnSp>
+        <p:nvCxnSpPr>
+          <p:cNvPr id="107" name="Straight Connector 106">
+            <a:extLst>
+              <a:ext uri="{FF2B5EF4-FFF2-40B4-BE49-F238E27FC236}">
+                <a16:creationId xmlns:a16="http://schemas.microsoft.com/office/drawing/2014/main" id="{D28AF258-7F21-D60D-6E5B-17C3A8C931EB}"/>
+              </a:ext>
+            </a:extLst>
+          </p:cNvPr>
+          <p:cNvCxnSpPr>
+            <a:cxnSpLocks/>
+          </p:cNvCxnSpPr>
+          <p:nvPr/>
+        </p:nvCxnSpPr>
+        <p:spPr>
+          <a:xfrm flipH="1">
+            <a:off x="1897858" y="3265884"/>
+            <a:ext cx="623176" cy="0"/>
+          </a:xfrm>
+          <a:prstGeom prst="line">
+            <a:avLst/>
+          </a:prstGeom>
+          <a:ln w="38100">
+            <a:solidFill>
+              <a:schemeClr val="tx1"/>
+            </a:solidFill>
+          </a:ln>
+        </p:spPr>
+        <p:style>
+          <a:lnRef idx="2">
+            <a:schemeClr val="accent1"/>
+          </a:lnRef>
+          <a:fillRef idx="0">
+            <a:schemeClr val="accent1"/>
+          </a:fillRef>
+          <a:effectRef idx="1">
+            <a:schemeClr val="accent1"/>
+          </a:effectRef>
+          <a:fontRef idx="minor">
+            <a:schemeClr val="tx1"/>
+          </a:fontRef>
+        </p:style>
+      </p:cxnSp>
+      <p:cxnSp>
+        <p:nvCxnSpPr>
+          <p:cNvPr id="108" name="Straight Connector 107">
+            <a:extLst>
+              <a:ext uri="{FF2B5EF4-FFF2-40B4-BE49-F238E27FC236}">
+                <a16:creationId xmlns:a16="http://schemas.microsoft.com/office/drawing/2014/main" id="{3A16C1C4-5FCA-DA25-3106-2FF47ED57EC4}"/>
+              </a:ext>
+            </a:extLst>
+          </p:cNvPr>
+          <p:cNvCxnSpPr>
+            <a:cxnSpLocks/>
+          </p:cNvCxnSpPr>
+          <p:nvPr/>
+        </p:nvCxnSpPr>
+        <p:spPr>
+          <a:xfrm flipH="1">
+            <a:off x="1901428" y="3667195"/>
+            <a:ext cx="623176" cy="0"/>
+          </a:xfrm>
+          <a:prstGeom prst="line">
+            <a:avLst/>
+          </a:prstGeom>
+          <a:ln w="38100">
+            <a:solidFill>
+              <a:schemeClr val="tx1"/>
+            </a:solidFill>
+          </a:ln>
+        </p:spPr>
+        <p:style>
+          <a:lnRef idx="2">
+            <a:schemeClr val="accent1"/>
+          </a:lnRef>
+          <a:fillRef idx="0">
+            <a:schemeClr val="accent1"/>
+          </a:fillRef>
+          <a:effectRef idx="1">
+            <a:schemeClr val="accent1"/>
+          </a:effectRef>
+          <a:fontRef idx="minor">
+            <a:schemeClr val="tx1"/>
+          </a:fontRef>
+        </p:style>
+      </p:cxnSp>
+      <p:cxnSp>
+        <p:nvCxnSpPr>
+          <p:cNvPr id="109" name="Straight Connector 108">
+            <a:extLst>
+              <a:ext uri="{FF2B5EF4-FFF2-40B4-BE49-F238E27FC236}">
+                <a16:creationId xmlns:a16="http://schemas.microsoft.com/office/drawing/2014/main" id="{A509A306-30C8-24F4-5F3F-A321728DED41}"/>
+              </a:ext>
+            </a:extLst>
+          </p:cNvPr>
+          <p:cNvCxnSpPr>
+            <a:cxnSpLocks/>
+          </p:cNvCxnSpPr>
+          <p:nvPr/>
+        </p:nvCxnSpPr>
+        <p:spPr>
+          <a:xfrm flipH="1">
+            <a:off x="1897858" y="4483938"/>
+            <a:ext cx="623176" cy="0"/>
+          </a:xfrm>
+          <a:prstGeom prst="line">
+            <a:avLst/>
+          </a:prstGeom>
+          <a:ln w="38100">
+            <a:solidFill>
+              <a:schemeClr val="tx1"/>
+            </a:solidFill>
+          </a:ln>
+        </p:spPr>
+        <p:style>
+          <a:lnRef idx="2">
+            <a:schemeClr val="accent1"/>
+          </a:lnRef>
+          <a:fillRef idx="0">
+            <a:schemeClr val="accent1"/>
+          </a:fillRef>
+          <a:effectRef idx="1">
+            <a:schemeClr val="accent1"/>
+          </a:effectRef>
+          <a:fontRef idx="minor">
+            <a:schemeClr val="tx1"/>
+          </a:fontRef>
+        </p:style>
+      </p:cxnSp>
+      <p:cxnSp>
+        <p:nvCxnSpPr>
+          <p:cNvPr id="110" name="Straight Connector 109">
+            <a:extLst>
+              <a:ext uri="{FF2B5EF4-FFF2-40B4-BE49-F238E27FC236}">
+                <a16:creationId xmlns:a16="http://schemas.microsoft.com/office/drawing/2014/main" id="{7B28384D-4D9F-81F9-86DE-5B15A46145D1}"/>
+              </a:ext>
+            </a:extLst>
+          </p:cNvPr>
+          <p:cNvCxnSpPr>
+            <a:cxnSpLocks/>
+          </p:cNvCxnSpPr>
+          <p:nvPr/>
+        </p:nvCxnSpPr>
+        <p:spPr>
+          <a:xfrm>
+            <a:off x="346075" y="4499698"/>
+            <a:ext cx="100989" cy="0"/>
+          </a:xfrm>
+          <a:prstGeom prst="line">
+            <a:avLst/>
+          </a:prstGeom>
+          <a:ln w="38100">
+            <a:solidFill>
+              <a:schemeClr val="tx1"/>
+            </a:solidFill>
+          </a:ln>
+        </p:spPr>
+        <p:style>
+          <a:lnRef idx="2">
+            <a:schemeClr val="accent1"/>
+          </a:lnRef>
+          <a:fillRef idx="0">
+            <a:schemeClr val="accent1"/>
+          </a:fillRef>
+          <a:effectRef idx="1">
+            <a:schemeClr val="accent1"/>
+          </a:effectRef>
+          <a:fontRef idx="minor">
+            <a:schemeClr val="tx1"/>
+          </a:fontRef>
+        </p:style>
+      </p:cxnSp>
+      <p:cxnSp>
+        <p:nvCxnSpPr>
+          <p:cNvPr id="112" name="Straight Connector 111">
+            <a:extLst>
+              <a:ext uri="{FF2B5EF4-FFF2-40B4-BE49-F238E27FC236}">
+                <a16:creationId xmlns:a16="http://schemas.microsoft.com/office/drawing/2014/main" id="{81C77AE5-F3DA-F4AB-7951-B3E678EB6A76}"/>
+              </a:ext>
+            </a:extLst>
+          </p:cNvPr>
+          <p:cNvCxnSpPr>
+            <a:cxnSpLocks/>
+          </p:cNvCxnSpPr>
+          <p:nvPr/>
+        </p:nvCxnSpPr>
+        <p:spPr>
+          <a:xfrm flipV="1">
+            <a:off x="368634" y="4517158"/>
+            <a:ext cx="0" cy="820019"/>
+          </a:xfrm>
+          <a:prstGeom prst="line">
+            <a:avLst/>
+          </a:prstGeom>
+          <a:ln w="38100">
+            <a:solidFill>
+              <a:schemeClr val="tx1"/>
+            </a:solidFill>
+          </a:ln>
+        </p:spPr>
+        <p:style>
+          <a:lnRef idx="2">
+            <a:schemeClr val="accent1"/>
+          </a:lnRef>
+          <a:fillRef idx="0">
+            <a:schemeClr val="accent1"/>
+          </a:fillRef>
+          <a:effectRef idx="1">
+            <a:schemeClr val="accent1"/>
+          </a:effectRef>
+          <a:fontRef idx="minor">
+            <a:schemeClr val="tx1"/>
+          </a:fontRef>
+        </p:style>
+      </p:cxnSp>
+      <p:cxnSp>
+        <p:nvCxnSpPr>
+          <p:cNvPr id="115" name="Straight Connector 114">
+            <a:extLst>
+              <a:ext uri="{FF2B5EF4-FFF2-40B4-BE49-F238E27FC236}">
+                <a16:creationId xmlns:a16="http://schemas.microsoft.com/office/drawing/2014/main" id="{2AFB3210-CF10-5012-B821-8E0DCA1DC515}"/>
+              </a:ext>
+            </a:extLst>
+          </p:cNvPr>
+          <p:cNvCxnSpPr>
+            <a:cxnSpLocks/>
+          </p:cNvCxnSpPr>
+          <p:nvPr/>
+        </p:nvCxnSpPr>
+        <p:spPr>
+          <a:xfrm>
+            <a:off x="359570" y="5320834"/>
+            <a:ext cx="5572600" cy="0"/>
+          </a:xfrm>
+          <a:prstGeom prst="line">
+            <a:avLst/>
+          </a:prstGeom>
+          <a:ln w="38100">
+            <a:solidFill>
+              <a:schemeClr val="tx1"/>
+            </a:solidFill>
+          </a:ln>
+        </p:spPr>
+        <p:style>
+          <a:lnRef idx="2">
+            <a:schemeClr val="accent1"/>
+          </a:lnRef>
+          <a:fillRef idx="0">
+            <a:schemeClr val="accent1"/>
+          </a:fillRef>
+          <a:effectRef idx="1">
+            <a:schemeClr val="accent1"/>
+          </a:effectRef>
+          <a:fontRef idx="minor">
+            <a:schemeClr val="tx1"/>
+          </a:fontRef>
+        </p:style>
+      </p:cxnSp>
+      <p:cxnSp>
+        <p:nvCxnSpPr>
+          <p:cNvPr id="117" name="Straight Connector 116">
+            <a:extLst>
+              <a:ext uri="{FF2B5EF4-FFF2-40B4-BE49-F238E27FC236}">
+                <a16:creationId xmlns:a16="http://schemas.microsoft.com/office/drawing/2014/main" id="{628A959A-D2CC-623C-B7B3-3192340444FC}"/>
+              </a:ext>
+            </a:extLst>
+          </p:cNvPr>
+          <p:cNvCxnSpPr>
+            <a:cxnSpLocks/>
+          </p:cNvCxnSpPr>
+          <p:nvPr/>
+        </p:nvCxnSpPr>
+        <p:spPr>
+          <a:xfrm flipV="1">
+            <a:off x="5910916" y="4445794"/>
+            <a:ext cx="0" cy="891383"/>
+          </a:xfrm>
+          <a:prstGeom prst="line">
+            <a:avLst/>
+          </a:prstGeom>
+          <a:ln w="38100">
+            <a:solidFill>
+              <a:schemeClr val="tx1"/>
+            </a:solidFill>
+          </a:ln>
+        </p:spPr>
+        <p:style>
+          <a:lnRef idx="2">
+            <a:schemeClr val="accent1"/>
+          </a:lnRef>
+          <a:fillRef idx="0">
+            <a:schemeClr val="accent1"/>
+          </a:fillRef>
+          <a:effectRef idx="1">
+            <a:schemeClr val="accent1"/>
+          </a:effectRef>
+          <a:fontRef idx="minor">
+            <a:schemeClr val="tx1"/>
+          </a:fontRef>
+        </p:style>
+      </p:cxnSp>
+      <p:cxnSp>
+        <p:nvCxnSpPr>
+          <p:cNvPr id="119" name="Straight Connector 118">
+            <a:extLst>
+              <a:ext uri="{FF2B5EF4-FFF2-40B4-BE49-F238E27FC236}">
+                <a16:creationId xmlns:a16="http://schemas.microsoft.com/office/drawing/2014/main" id="{AA1822AD-18E3-3E66-7126-ADCA348C0539}"/>
+              </a:ext>
+            </a:extLst>
+          </p:cNvPr>
+          <p:cNvCxnSpPr>
+            <a:cxnSpLocks/>
+          </p:cNvCxnSpPr>
+          <p:nvPr/>
+        </p:nvCxnSpPr>
+        <p:spPr>
+          <a:xfrm flipV="1">
+            <a:off x="366432" y="1599004"/>
+            <a:ext cx="0" cy="837017"/>
+          </a:xfrm>
+          <a:prstGeom prst="line">
+            <a:avLst/>
+          </a:prstGeom>
+          <a:ln w="38100">
+            <a:solidFill>
+              <a:schemeClr val="tx1"/>
+            </a:solidFill>
+          </a:ln>
+        </p:spPr>
+        <p:style>
+          <a:lnRef idx="2">
+            <a:schemeClr val="accent1"/>
+          </a:lnRef>
+          <a:fillRef idx="0">
+            <a:schemeClr val="accent1"/>
+          </a:fillRef>
+          <a:effectRef idx="1">
+            <a:schemeClr val="accent1"/>
+          </a:effectRef>
+          <a:fontRef idx="minor">
+            <a:schemeClr val="tx1"/>
+          </a:fontRef>
+        </p:style>
+      </p:cxnSp>
+      <p:cxnSp>
+        <p:nvCxnSpPr>
+          <p:cNvPr id="120" name="Straight Connector 119">
+            <a:extLst>
+              <a:ext uri="{FF2B5EF4-FFF2-40B4-BE49-F238E27FC236}">
+                <a16:creationId xmlns:a16="http://schemas.microsoft.com/office/drawing/2014/main" id="{78EE71E4-8E17-583F-E49C-8108296ED642}"/>
+              </a:ext>
+            </a:extLst>
+          </p:cNvPr>
+          <p:cNvCxnSpPr>
+            <a:cxnSpLocks/>
+          </p:cNvCxnSpPr>
+          <p:nvPr/>
+        </p:nvCxnSpPr>
+        <p:spPr>
+          <a:xfrm>
+            <a:off x="354987" y="1585911"/>
+            <a:ext cx="5572600" cy="0"/>
+          </a:xfrm>
+          <a:prstGeom prst="line">
+            <a:avLst/>
+          </a:prstGeom>
+          <a:ln w="38100">
+            <a:solidFill>
+              <a:schemeClr val="tx1"/>
+            </a:solidFill>
+          </a:ln>
+        </p:spPr>
+        <p:style>
+          <a:lnRef idx="2">
+            <a:schemeClr val="accent1"/>
+          </a:lnRef>
+          <a:fillRef idx="0">
+            <a:schemeClr val="accent1"/>
+          </a:fillRef>
+          <a:effectRef idx="1">
+            <a:schemeClr val="accent1"/>
+          </a:effectRef>
+          <a:fontRef idx="minor">
+            <a:schemeClr val="tx1"/>
+          </a:fontRef>
+        </p:style>
+      </p:cxnSp>
+      <p:cxnSp>
+        <p:nvCxnSpPr>
+          <p:cNvPr id="121" name="Straight Connector 120">
+            <a:extLst>
+              <a:ext uri="{FF2B5EF4-FFF2-40B4-BE49-F238E27FC236}">
+                <a16:creationId xmlns:a16="http://schemas.microsoft.com/office/drawing/2014/main" id="{396211BC-136A-5929-8705-A0AE3289F4EF}"/>
+              </a:ext>
+            </a:extLst>
+          </p:cNvPr>
+          <p:cNvCxnSpPr>
+            <a:cxnSpLocks/>
+          </p:cNvCxnSpPr>
+          <p:nvPr/>
+        </p:nvCxnSpPr>
+        <p:spPr>
+          <a:xfrm flipV="1">
+            <a:off x="5911095" y="1566863"/>
+            <a:ext cx="0" cy="852160"/>
+          </a:xfrm>
+          <a:prstGeom prst="line">
+            <a:avLst/>
+          </a:prstGeom>
+          <a:ln w="38100">
+            <a:solidFill>
+              <a:schemeClr val="tx1"/>
+            </a:solidFill>
+          </a:ln>
+        </p:spPr>
+        <p:style>
+          <a:lnRef idx="2">
+            <a:schemeClr val="accent1"/>
+          </a:lnRef>
+          <a:fillRef idx="0">
+            <a:schemeClr val="accent1"/>
+          </a:fillRef>
+          <a:effectRef idx="1">
+            <a:schemeClr val="accent1"/>
+          </a:effectRef>
+          <a:fontRef idx="minor">
+            <a:schemeClr val="tx1"/>
+          </a:fontRef>
+        </p:style>
+      </p:cxnSp>
+      <p:cxnSp>
+        <p:nvCxnSpPr>
+          <p:cNvPr id="126" name="Straight Connector 125">
+            <a:extLst>
+              <a:ext uri="{FF2B5EF4-FFF2-40B4-BE49-F238E27FC236}">
+                <a16:creationId xmlns:a16="http://schemas.microsoft.com/office/drawing/2014/main" id="{0E939E24-9C34-C42E-0134-ED4A227C6D41}"/>
+              </a:ext>
+            </a:extLst>
+          </p:cNvPr>
+          <p:cNvCxnSpPr>
+            <a:cxnSpLocks/>
+          </p:cNvCxnSpPr>
+          <p:nvPr/>
+        </p:nvCxnSpPr>
+        <p:spPr>
+          <a:xfrm>
+            <a:off x="5145244" y="3041242"/>
+            <a:ext cx="711995" cy="186339"/>
+          </a:xfrm>
+          <a:prstGeom prst="line">
+            <a:avLst/>
+          </a:prstGeom>
+          <a:ln w="38100">
+            <a:solidFill>
+              <a:schemeClr val="tx1"/>
+            </a:solidFill>
+          </a:ln>
+        </p:spPr>
+        <p:style>
+          <a:lnRef idx="2">
+            <a:schemeClr val="accent1"/>
+          </a:lnRef>
+          <a:fillRef idx="0">
+            <a:schemeClr val="accent1"/>
+          </a:fillRef>
+          <a:effectRef idx="1">
+            <a:schemeClr val="accent1"/>
+          </a:effectRef>
+          <a:fontRef idx="minor">
+            <a:schemeClr val="tx1"/>
+          </a:fontRef>
+        </p:style>
+      </p:cxnSp>
+      <p:cxnSp>
+        <p:nvCxnSpPr>
+          <p:cNvPr id="127" name="Straight Connector 126">
+            <a:extLst>
+              <a:ext uri="{FF2B5EF4-FFF2-40B4-BE49-F238E27FC236}">
+                <a16:creationId xmlns:a16="http://schemas.microsoft.com/office/drawing/2014/main" id="{74E916A9-2575-F538-DE5D-0C664E750E6B}"/>
+              </a:ext>
+            </a:extLst>
+          </p:cNvPr>
+          <p:cNvCxnSpPr>
+            <a:cxnSpLocks/>
+          </p:cNvCxnSpPr>
+          <p:nvPr/>
+        </p:nvCxnSpPr>
+        <p:spPr>
+          <a:xfrm>
+            <a:off x="5142862" y="2421108"/>
+            <a:ext cx="711995" cy="186339"/>
+          </a:xfrm>
+          <a:prstGeom prst="line">
+            <a:avLst/>
+          </a:prstGeom>
+          <a:ln w="38100">
+            <a:solidFill>
+              <a:schemeClr val="tx1"/>
+            </a:solidFill>
+          </a:ln>
+        </p:spPr>
+        <p:style>
+          <a:lnRef idx="2">
+            <a:schemeClr val="accent1"/>
+          </a:lnRef>
+          <a:fillRef idx="0">
+            <a:schemeClr val="accent1"/>
+          </a:fillRef>
+          <a:effectRef idx="1">
+            <a:schemeClr val="accent1"/>
+          </a:effectRef>
+          <a:fontRef idx="minor">
+            <a:schemeClr val="tx1"/>
+          </a:fontRef>
+        </p:style>
+      </p:cxnSp>
+      <p:cxnSp>
+        <p:nvCxnSpPr>
+          <p:cNvPr id="128" name="Straight Connector 127">
+            <a:extLst>
+              <a:ext uri="{FF2B5EF4-FFF2-40B4-BE49-F238E27FC236}">
+                <a16:creationId xmlns:a16="http://schemas.microsoft.com/office/drawing/2014/main" id="{A6BB3E38-329D-6D2F-6028-FD17700B09CE}"/>
+              </a:ext>
+            </a:extLst>
+          </p:cNvPr>
+          <p:cNvCxnSpPr>
+            <a:cxnSpLocks/>
+          </p:cNvCxnSpPr>
+          <p:nvPr/>
+        </p:nvCxnSpPr>
+        <p:spPr>
+          <a:xfrm>
+            <a:off x="5142069" y="3870409"/>
+            <a:ext cx="711995" cy="186339"/>
+          </a:xfrm>
+          <a:prstGeom prst="line">
+            <a:avLst/>
+          </a:prstGeom>
+          <a:ln w="38100">
+            <a:solidFill>
+              <a:schemeClr val="tx1"/>
+            </a:solidFill>
+          </a:ln>
+        </p:spPr>
+        <p:style>
+          <a:lnRef idx="2">
+            <a:schemeClr val="accent1"/>
+          </a:lnRef>
+          <a:fillRef idx="0">
+            <a:schemeClr val="accent1"/>
+          </a:fillRef>
+          <a:effectRef idx="1">
+            <a:schemeClr val="accent1"/>
+          </a:effectRef>
+          <a:fontRef idx="minor">
+            <a:schemeClr val="tx1"/>
+          </a:fontRef>
+        </p:style>
+      </p:cxnSp>
+      <p:cxnSp>
+        <p:nvCxnSpPr>
+          <p:cNvPr id="129" name="Straight Connector 128">
+            <a:extLst>
+              <a:ext uri="{FF2B5EF4-FFF2-40B4-BE49-F238E27FC236}">
+                <a16:creationId xmlns:a16="http://schemas.microsoft.com/office/drawing/2014/main" id="{68186B7D-BF35-511C-0BF2-6BEB46494445}"/>
+              </a:ext>
+            </a:extLst>
+          </p:cNvPr>
+          <p:cNvCxnSpPr>
+            <a:cxnSpLocks/>
+          </p:cNvCxnSpPr>
+          <p:nvPr/>
+        </p:nvCxnSpPr>
+        <p:spPr>
+          <a:xfrm>
+            <a:off x="5142068" y="4079602"/>
+            <a:ext cx="711995" cy="185246"/>
+          </a:xfrm>
+          <a:prstGeom prst="line">
+            <a:avLst/>
+          </a:prstGeom>
+          <a:ln w="38100">
+            <a:solidFill>
+              <a:schemeClr val="tx1"/>
+            </a:solidFill>
+          </a:ln>
+        </p:spPr>
+        <p:style>
+          <a:lnRef idx="2">
+            <a:schemeClr val="accent1"/>
+          </a:lnRef>
+          <a:fillRef idx="0">
+            <a:schemeClr val="accent1"/>
+          </a:fillRef>
+          <a:effectRef idx="1">
+            <a:schemeClr val="accent1"/>
+          </a:effectRef>
+          <a:fontRef idx="minor">
+            <a:schemeClr val="tx1"/>
+          </a:fontRef>
+        </p:style>
+      </p:cxnSp>
+      <p:cxnSp>
+        <p:nvCxnSpPr>
+          <p:cNvPr id="130" name="Straight Connector 129">
+            <a:extLst>
+              <a:ext uri="{FF2B5EF4-FFF2-40B4-BE49-F238E27FC236}">
+                <a16:creationId xmlns:a16="http://schemas.microsoft.com/office/drawing/2014/main" id="{08F097F9-D9AA-C68A-9471-F918FA9F0B7D}"/>
+              </a:ext>
+            </a:extLst>
+          </p:cNvPr>
+          <p:cNvCxnSpPr>
+            <a:cxnSpLocks/>
+          </p:cNvCxnSpPr>
+          <p:nvPr/>
+        </p:nvCxnSpPr>
+        <p:spPr>
+          <a:xfrm>
+            <a:off x="5130403" y="4287702"/>
+            <a:ext cx="780513" cy="181111"/>
+          </a:xfrm>
+          <a:prstGeom prst="line">
+            <a:avLst/>
+          </a:prstGeom>
+          <a:ln w="38100">
+            <a:solidFill>
+              <a:schemeClr val="tx1"/>
+            </a:solidFill>
+          </a:ln>
+        </p:spPr>
+        <p:style>
+          <a:lnRef idx="2">
+            <a:schemeClr val="accent1"/>
+          </a:lnRef>
+          <a:fillRef idx="0">
+            <a:schemeClr val="accent1"/>
+          </a:fillRef>
+          <a:effectRef idx="1">
+            <a:schemeClr val="accent1"/>
+          </a:effectRef>
+          <a:fontRef idx="minor">
+            <a:schemeClr val="tx1"/>
+          </a:fontRef>
+        </p:style>
+      </p:cxnSp>
+      <p:cxnSp>
+        <p:nvCxnSpPr>
+          <p:cNvPr id="131" name="Straight Connector 130">
+            <a:extLst>
+              <a:ext uri="{FF2B5EF4-FFF2-40B4-BE49-F238E27FC236}">
+                <a16:creationId xmlns:a16="http://schemas.microsoft.com/office/drawing/2014/main" id="{1FD59BAF-88D4-E228-9AE1-769E28CDEE6D}"/>
+              </a:ext>
+            </a:extLst>
+          </p:cNvPr>
+          <p:cNvCxnSpPr>
+            <a:cxnSpLocks/>
+          </p:cNvCxnSpPr>
+          <p:nvPr/>
+        </p:nvCxnSpPr>
+        <p:spPr>
+          <a:xfrm>
+            <a:off x="5142068" y="3661216"/>
+            <a:ext cx="711995" cy="186339"/>
+          </a:xfrm>
+          <a:prstGeom prst="line">
+            <a:avLst/>
+          </a:prstGeom>
+          <a:ln w="38100">
+            <a:solidFill>
+              <a:schemeClr val="tx1"/>
+            </a:solidFill>
+          </a:ln>
+        </p:spPr>
+        <p:style>
+          <a:lnRef idx="2">
+            <a:schemeClr val="accent1"/>
+          </a:lnRef>
+          <a:fillRef idx="0">
+            <a:schemeClr val="accent1"/>
+          </a:fillRef>
+          <a:effectRef idx="1">
+            <a:schemeClr val="accent1"/>
+          </a:effectRef>
+          <a:fontRef idx="minor">
+            <a:schemeClr val="tx1"/>
+          </a:fontRef>
+        </p:style>
+      </p:cxnSp>
+      <p:cxnSp>
+        <p:nvCxnSpPr>
+          <p:cNvPr id="139" name="Straight Connector 138">
+            <a:extLst>
+              <a:ext uri="{FF2B5EF4-FFF2-40B4-BE49-F238E27FC236}">
+                <a16:creationId xmlns:a16="http://schemas.microsoft.com/office/drawing/2014/main" id="{F2FD2FC3-FC47-8988-9666-46AC6093BCE0}"/>
+              </a:ext>
+            </a:extLst>
+          </p:cNvPr>
+          <p:cNvCxnSpPr>
+            <a:cxnSpLocks/>
+          </p:cNvCxnSpPr>
+          <p:nvPr/>
+        </p:nvCxnSpPr>
+        <p:spPr>
+          <a:xfrm>
+            <a:off x="5143656" y="2631889"/>
+            <a:ext cx="711995" cy="186339"/>
+          </a:xfrm>
+          <a:prstGeom prst="line">
+            <a:avLst/>
+          </a:prstGeom>
+          <a:ln w="38100">
+            <a:solidFill>
+              <a:schemeClr val="tx1"/>
+            </a:solidFill>
+          </a:ln>
+        </p:spPr>
+        <p:style>
+          <a:lnRef idx="2">
+            <a:schemeClr val="accent1"/>
+          </a:lnRef>
+          <a:fillRef idx="0">
+            <a:schemeClr val="accent1"/>
+          </a:fillRef>
+          <a:effectRef idx="1">
+            <a:schemeClr val="accent1"/>
+          </a:effectRef>
+          <a:fontRef idx="minor">
+            <a:schemeClr val="tx1"/>
+          </a:fontRef>
+        </p:style>
+      </p:cxnSp>
+      <p:cxnSp>
+        <p:nvCxnSpPr>
+          <p:cNvPr id="140" name="Straight Connector 139">
+            <a:extLst>
+              <a:ext uri="{FF2B5EF4-FFF2-40B4-BE49-F238E27FC236}">
+                <a16:creationId xmlns:a16="http://schemas.microsoft.com/office/drawing/2014/main" id="{396D18DD-1E3D-8B5D-657A-588B19002A9E}"/>
+              </a:ext>
+            </a:extLst>
+          </p:cNvPr>
+          <p:cNvCxnSpPr>
+            <a:cxnSpLocks/>
+          </p:cNvCxnSpPr>
+          <p:nvPr/>
+        </p:nvCxnSpPr>
+        <p:spPr>
+          <a:xfrm>
+            <a:off x="5143655" y="2839494"/>
+            <a:ext cx="711995" cy="185246"/>
+          </a:xfrm>
+          <a:prstGeom prst="line">
+            <a:avLst/>
+          </a:prstGeom>
+          <a:ln w="38100">
+            <a:solidFill>
+              <a:schemeClr val="tx1"/>
+            </a:solidFill>
+          </a:ln>
+        </p:spPr>
+        <p:style>
+          <a:lnRef idx="2">
+            <a:schemeClr val="accent1"/>
+          </a:lnRef>
+          <a:fillRef idx="0">
+            <a:schemeClr val="accent1"/>
+          </a:fillRef>
+          <a:effectRef idx="1">
+            <a:schemeClr val="accent1"/>
+          </a:effectRef>
+          <a:fontRef idx="minor">
+            <a:schemeClr val="tx1"/>
+          </a:fontRef>
+        </p:style>
+      </p:cxnSp>
+      <p:cxnSp>
+        <p:nvCxnSpPr>
+          <p:cNvPr id="141" name="Straight Connector 140">
+            <a:extLst>
+              <a:ext uri="{FF2B5EF4-FFF2-40B4-BE49-F238E27FC236}">
+                <a16:creationId xmlns:a16="http://schemas.microsoft.com/office/drawing/2014/main" id="{D4F8C20A-D175-9BC3-A05B-D51A4CADCE95}"/>
+              </a:ext>
+            </a:extLst>
+          </p:cNvPr>
+          <p:cNvCxnSpPr>
+            <a:cxnSpLocks/>
+          </p:cNvCxnSpPr>
+          <p:nvPr/>
+        </p:nvCxnSpPr>
+        <p:spPr>
+          <a:xfrm>
+            <a:off x="5832872" y="2408887"/>
+            <a:ext cx="94715" cy="0"/>
+          </a:xfrm>
+          <a:prstGeom prst="line">
+            <a:avLst/>
+          </a:prstGeom>
+          <a:ln w="38100">
+            <a:solidFill>
+              <a:schemeClr val="tx1"/>
+            </a:solidFill>
+          </a:ln>
+        </p:spPr>
+        <p:style>
+          <a:lnRef idx="2">
+            <a:schemeClr val="accent1"/>
+          </a:lnRef>
+          <a:fillRef idx="0">
+            <a:schemeClr val="accent1"/>
+          </a:fillRef>
+          <a:effectRef idx="1">
+            <a:schemeClr val="accent1"/>
+          </a:effectRef>
+          <a:fontRef idx="minor">
+            <a:schemeClr val="tx1"/>
+          </a:fontRef>
+        </p:style>
+      </p:cxnSp>
+      <p:cxnSp>
+        <p:nvCxnSpPr>
+          <p:cNvPr id="144" name="Straight Connector 143">
+            <a:extLst>
+              <a:ext uri="{FF2B5EF4-FFF2-40B4-BE49-F238E27FC236}">
+                <a16:creationId xmlns:a16="http://schemas.microsoft.com/office/drawing/2014/main" id="{4608898C-2B31-E887-BF52-181B81F6E854}"/>
+              </a:ext>
+            </a:extLst>
+          </p:cNvPr>
+          <p:cNvCxnSpPr>
+            <a:cxnSpLocks/>
+          </p:cNvCxnSpPr>
+          <p:nvPr/>
+        </p:nvCxnSpPr>
+        <p:spPr>
+          <a:xfrm>
+            <a:off x="5832872" y="3217847"/>
+            <a:ext cx="727472" cy="0"/>
+          </a:xfrm>
+          <a:prstGeom prst="line">
+            <a:avLst/>
+          </a:prstGeom>
+          <a:ln w="38100">
+            <a:solidFill>
+              <a:schemeClr val="tx1"/>
+            </a:solidFill>
+          </a:ln>
+        </p:spPr>
+        <p:style>
+          <a:lnRef idx="2">
+            <a:schemeClr val="accent1"/>
+          </a:lnRef>
+          <a:fillRef idx="0">
+            <a:schemeClr val="accent1"/>
+          </a:fillRef>
+          <a:effectRef idx="1">
+            <a:schemeClr val="accent1"/>
+          </a:effectRef>
+          <a:fontRef idx="minor">
+            <a:schemeClr val="tx1"/>
+          </a:fontRef>
+        </p:style>
+      </p:cxnSp>
+      <p:cxnSp>
+        <p:nvCxnSpPr>
+          <p:cNvPr id="147" name="Straight Connector 146">
+            <a:extLst>
+              <a:ext uri="{FF2B5EF4-FFF2-40B4-BE49-F238E27FC236}">
+                <a16:creationId xmlns:a16="http://schemas.microsoft.com/office/drawing/2014/main" id="{24240F29-CCC1-B1EC-6041-F825DF8B0009}"/>
+              </a:ext>
+            </a:extLst>
+          </p:cNvPr>
+          <p:cNvCxnSpPr>
+            <a:cxnSpLocks/>
+          </p:cNvCxnSpPr>
+          <p:nvPr/>
+        </p:nvCxnSpPr>
+        <p:spPr>
+          <a:xfrm>
+            <a:off x="5832872" y="3681730"/>
+            <a:ext cx="727472" cy="0"/>
+          </a:xfrm>
+          <a:prstGeom prst="line">
+            <a:avLst/>
+          </a:prstGeom>
+          <a:ln w="38100">
+            <a:solidFill>
+              <a:schemeClr val="tx1"/>
+            </a:solidFill>
+          </a:ln>
+        </p:spPr>
+        <p:style>
+          <a:lnRef idx="2">
+            <a:schemeClr val="accent1"/>
+          </a:lnRef>
+          <a:fillRef idx="0">
+            <a:schemeClr val="accent1"/>
+          </a:fillRef>
+          <a:effectRef idx="1">
+            <a:schemeClr val="accent1"/>
+          </a:effectRef>
+          <a:fontRef idx="minor">
+            <a:schemeClr val="tx1"/>
+          </a:fontRef>
+        </p:style>
+      </p:cxnSp>
+      <p:sp>
+        <p:nvSpPr>
+          <p:cNvPr id="148" name="Oval 147">
+            <a:extLst>
+              <a:ext uri="{FF2B5EF4-FFF2-40B4-BE49-F238E27FC236}">
+                <a16:creationId xmlns:a16="http://schemas.microsoft.com/office/drawing/2014/main" id="{2BB0EFC4-CE4C-3DFA-11A6-64975DD9BEF1}"/>
+              </a:ext>
+            </a:extLst>
+          </p:cNvPr>
+          <p:cNvSpPr/>
+          <p:nvPr/>
+        </p:nvSpPr>
+        <p:spPr>
+          <a:xfrm>
+            <a:off x="6577628" y="3621900"/>
+            <a:ext cx="117698" cy="117698"/>
+          </a:xfrm>
+          <a:prstGeom prst="ellipse">
+            <a:avLst/>
+          </a:prstGeom>
+          <a:noFill/>
+          <a:ln w="38100">
+            <a:solidFill>
+              <a:schemeClr val="tx1"/>
+            </a:solidFill>
+          </a:ln>
+        </p:spPr>
+        <p:style>
+          <a:lnRef idx="2">
+            <a:schemeClr val="accent1">
+              <a:shade val="15000"/>
+            </a:schemeClr>
+          </a:lnRef>
+          <a:fillRef idx="1">
+            <a:schemeClr val="accent1"/>
+          </a:fillRef>
+          <a:effectRef idx="0">
+            <a:schemeClr val="accent1"/>
+          </a:effectRef>
+          <a:fontRef idx="minor">
+            <a:schemeClr val="lt1"/>
+          </a:fontRef>
+        </p:style>
+        <p:txBody>
+          <a:bodyPr rtlCol="0" anchor="ctr"/>
+          <a:lstStyle/>
+          <a:p>
+            <a:pPr algn="ctr"/>
+            <a:endParaRPr lang="en-US"/>
+          </a:p>
+        </p:txBody>
+      </p:sp>
+      <p:sp>
+        <p:nvSpPr>
+          <p:cNvPr id="150" name="Oval 149">
+            <a:extLst>
+              <a:ext uri="{FF2B5EF4-FFF2-40B4-BE49-F238E27FC236}">
+                <a16:creationId xmlns:a16="http://schemas.microsoft.com/office/drawing/2014/main" id="{F8DB3EEA-93DD-08B4-EB04-EF99C92D2167}"/>
+              </a:ext>
+            </a:extLst>
+          </p:cNvPr>
+          <p:cNvSpPr/>
+          <p:nvPr/>
+        </p:nvSpPr>
+        <p:spPr>
+          <a:xfrm>
+            <a:off x="6575664" y="3167944"/>
+            <a:ext cx="119661" cy="119661"/>
+          </a:xfrm>
+          <a:prstGeom prst="ellipse">
+            <a:avLst/>
+          </a:prstGeom>
+          <a:noFill/>
+          <a:ln w="38100">
+            <a:solidFill>
+              <a:schemeClr val="tx1"/>
+            </a:solidFill>
+          </a:ln>
+        </p:spPr>
+        <p:style>
+          <a:lnRef idx="2">
+            <a:schemeClr val="accent1">
+              <a:shade val="15000"/>
+            </a:schemeClr>
+          </a:lnRef>
+          <a:fillRef idx="1">
+            <a:schemeClr val="accent1"/>
+          </a:fillRef>
+          <a:effectRef idx="0">
+            <a:schemeClr val="accent1"/>
+          </a:effectRef>
+          <a:fontRef idx="minor">
+            <a:schemeClr val="lt1"/>
+          </a:fontRef>
+        </p:style>
+        <p:txBody>
+          <a:bodyPr rtlCol="0" anchor="ctr"/>
+          <a:lstStyle/>
+          <a:p>
+            <a:pPr algn="ctr"/>
+            <a:endParaRPr lang="en-US"/>
+          </a:p>
+        </p:txBody>
+      </p:sp>
+      <p:sp>
+        <p:nvSpPr>
+          <p:cNvPr id="152" name="Oval 151">
+            <a:extLst>
+              <a:ext uri="{FF2B5EF4-FFF2-40B4-BE49-F238E27FC236}">
+                <a16:creationId xmlns:a16="http://schemas.microsoft.com/office/drawing/2014/main" id="{B1D89DC9-DE0F-4471-6FDF-027FF208DFF3}"/>
+              </a:ext>
+            </a:extLst>
+          </p:cNvPr>
+          <p:cNvSpPr/>
+          <p:nvPr/>
+        </p:nvSpPr>
+        <p:spPr>
+          <a:xfrm>
+            <a:off x="-422975" y="3621690"/>
+            <a:ext cx="119662" cy="119662"/>
+          </a:xfrm>
+          <a:prstGeom prst="ellipse">
+            <a:avLst/>
+          </a:prstGeom>
+          <a:noFill/>
+          <a:ln w="38100">
+            <a:solidFill>
+              <a:schemeClr val="tx1"/>
+            </a:solidFill>
+          </a:ln>
+        </p:spPr>
+        <p:style>
+          <a:lnRef idx="2">
+            <a:schemeClr val="accent1">
+              <a:shade val="15000"/>
+            </a:schemeClr>
+          </a:lnRef>
+          <a:fillRef idx="1">
+            <a:schemeClr val="accent1"/>
+          </a:fillRef>
+          <a:effectRef idx="0">
+            <a:schemeClr val="accent1"/>
+          </a:effectRef>
+          <a:fontRef idx="minor">
+            <a:schemeClr val="lt1"/>
+          </a:fontRef>
+        </p:style>
+        <p:txBody>
+          <a:bodyPr rtlCol="0" anchor="ctr"/>
+          <a:lstStyle/>
+          <a:p>
+            <a:pPr algn="ctr"/>
+            <a:endParaRPr lang="en-US"/>
+          </a:p>
+        </p:txBody>
+      </p:sp>
+      <p:sp>
+        <p:nvSpPr>
+          <p:cNvPr id="154" name="Oval 153">
+            <a:extLst>
+              <a:ext uri="{FF2B5EF4-FFF2-40B4-BE49-F238E27FC236}">
+                <a16:creationId xmlns:a16="http://schemas.microsoft.com/office/drawing/2014/main" id="{C7A6FBA7-0585-8179-6967-4CF03135A3CD}"/>
+              </a:ext>
+            </a:extLst>
+          </p:cNvPr>
+          <p:cNvSpPr/>
+          <p:nvPr/>
+        </p:nvSpPr>
+        <p:spPr>
+          <a:xfrm>
+            <a:off x="-422975" y="3171307"/>
+            <a:ext cx="119661" cy="119661"/>
+          </a:xfrm>
+          <a:prstGeom prst="ellipse">
+            <a:avLst/>
+          </a:prstGeom>
+          <a:noFill/>
+          <a:ln w="38100">
+            <a:solidFill>
+              <a:schemeClr val="tx1"/>
+            </a:solidFill>
+          </a:ln>
+        </p:spPr>
+        <p:style>
+          <a:lnRef idx="2">
+            <a:schemeClr val="accent1">
+              <a:shade val="15000"/>
+            </a:schemeClr>
+          </a:lnRef>
+          <a:fillRef idx="1">
+            <a:schemeClr val="accent1"/>
+          </a:fillRef>
+          <a:effectRef idx="0">
+            <a:schemeClr val="accent1"/>
+          </a:effectRef>
+          <a:fontRef idx="minor">
+            <a:schemeClr val="lt1"/>
+          </a:fontRef>
+        </p:style>
+        <p:txBody>
+          <a:bodyPr rtlCol="0" anchor="ctr"/>
+          <a:lstStyle/>
+          <a:p>
+            <a:pPr algn="ctr"/>
+            <a:endParaRPr lang="en-US"/>
+          </a:p>
+        </p:txBody>
+      </p:sp>
+      <p:sp>
+        <p:nvSpPr>
+          <p:cNvPr id="158" name="Oval 157">
+            <a:extLst>
+              <a:ext uri="{FF2B5EF4-FFF2-40B4-BE49-F238E27FC236}">
+                <a16:creationId xmlns:a16="http://schemas.microsoft.com/office/drawing/2014/main" id="{E1902199-121F-F417-DBAC-A2AE7A76F8AB}"/>
+              </a:ext>
+            </a:extLst>
+          </p:cNvPr>
+          <p:cNvSpPr/>
+          <p:nvPr/>
+        </p:nvSpPr>
+        <p:spPr>
+          <a:xfrm>
+            <a:off x="1765275" y="3211711"/>
+            <a:ext cx="119662" cy="119662"/>
+          </a:xfrm>
+          <a:prstGeom prst="ellipse">
+            <a:avLst/>
+          </a:prstGeom>
+          <a:noFill/>
+          <a:ln w="38100">
+            <a:solidFill>
+              <a:schemeClr val="tx1"/>
+            </a:solidFill>
+          </a:ln>
+        </p:spPr>
+        <p:style>
+          <a:lnRef idx="2">
+            <a:schemeClr val="accent1">
+              <a:shade val="15000"/>
+            </a:schemeClr>
+          </a:lnRef>
+          <a:fillRef idx="1">
+            <a:schemeClr val="accent1"/>
+          </a:fillRef>
+          <a:effectRef idx="0">
+            <a:schemeClr val="accent1"/>
+          </a:effectRef>
+          <a:fontRef idx="minor">
+            <a:schemeClr val="lt1"/>
+          </a:fontRef>
+        </p:style>
+        <p:txBody>
+          <a:bodyPr rtlCol="0" anchor="ctr"/>
+          <a:lstStyle/>
+          <a:p>
+            <a:pPr algn="ctr"/>
+            <a:endParaRPr lang="en-US"/>
+          </a:p>
+        </p:txBody>
+      </p:sp>
+      <p:sp>
+        <p:nvSpPr>
+          <p:cNvPr id="160" name="Oval 159">
+            <a:extLst>
+              <a:ext uri="{FF2B5EF4-FFF2-40B4-BE49-F238E27FC236}">
+                <a16:creationId xmlns:a16="http://schemas.microsoft.com/office/drawing/2014/main" id="{3E28F234-159E-415B-2A70-6F2B08EE7EAD}"/>
+              </a:ext>
+            </a:extLst>
+          </p:cNvPr>
+          <p:cNvSpPr/>
+          <p:nvPr/>
+        </p:nvSpPr>
+        <p:spPr>
+          <a:xfrm>
+            <a:off x="1765275" y="2385952"/>
+            <a:ext cx="119661" cy="119661"/>
+          </a:xfrm>
+          <a:prstGeom prst="ellipse">
+            <a:avLst/>
+          </a:prstGeom>
+          <a:noFill/>
+          <a:ln w="38100">
+            <a:solidFill>
+              <a:schemeClr val="tx1"/>
+            </a:solidFill>
+          </a:ln>
+        </p:spPr>
+        <p:style>
+          <a:lnRef idx="2">
+            <a:schemeClr val="accent1">
+              <a:shade val="15000"/>
+            </a:schemeClr>
+          </a:lnRef>
+          <a:fillRef idx="1">
+            <a:schemeClr val="accent1"/>
+          </a:fillRef>
+          <a:effectRef idx="0">
+            <a:schemeClr val="accent1"/>
+          </a:effectRef>
+          <a:fontRef idx="minor">
+            <a:schemeClr val="lt1"/>
+          </a:fontRef>
+        </p:style>
+        <p:txBody>
+          <a:bodyPr rtlCol="0" anchor="ctr"/>
+          <a:lstStyle/>
+          <a:p>
+            <a:pPr algn="ctr"/>
+            <a:endParaRPr lang="en-US"/>
+          </a:p>
+        </p:txBody>
+      </p:sp>
+      <p:sp>
+        <p:nvSpPr>
+          <p:cNvPr id="162" name="Oval 161">
+            <a:extLst>
+              <a:ext uri="{FF2B5EF4-FFF2-40B4-BE49-F238E27FC236}">
+                <a16:creationId xmlns:a16="http://schemas.microsoft.com/office/drawing/2014/main" id="{36553D98-25B5-64A3-89C1-5C506E94465A}"/>
+              </a:ext>
+            </a:extLst>
+          </p:cNvPr>
+          <p:cNvSpPr/>
+          <p:nvPr/>
+        </p:nvSpPr>
+        <p:spPr>
+          <a:xfrm>
+            <a:off x="1765275" y="3608530"/>
+            <a:ext cx="119661" cy="119661"/>
+          </a:xfrm>
+          <a:prstGeom prst="ellipse">
+            <a:avLst/>
+          </a:prstGeom>
+          <a:noFill/>
+          <a:ln w="38100">
+            <a:solidFill>
+              <a:schemeClr val="tx1"/>
+            </a:solidFill>
+          </a:ln>
+        </p:spPr>
+        <p:style>
+          <a:lnRef idx="2">
+            <a:schemeClr val="accent1">
+              <a:shade val="15000"/>
+            </a:schemeClr>
+          </a:lnRef>
+          <a:fillRef idx="1">
+            <a:schemeClr val="accent1"/>
+          </a:fillRef>
+          <a:effectRef idx="0">
+            <a:schemeClr val="accent1"/>
+          </a:effectRef>
+          <a:fontRef idx="minor">
+            <a:schemeClr val="lt1"/>
+          </a:fontRef>
+        </p:style>
+        <p:txBody>
+          <a:bodyPr rtlCol="0" anchor="ctr"/>
+          <a:lstStyle/>
+          <a:p>
+            <a:pPr algn="ctr"/>
+            <a:endParaRPr lang="en-US"/>
+          </a:p>
+        </p:txBody>
+      </p:sp>
+      <p:sp>
+        <p:nvSpPr>
+          <p:cNvPr id="164" name="Oval 163">
+            <a:extLst>
+              <a:ext uri="{FF2B5EF4-FFF2-40B4-BE49-F238E27FC236}">
+                <a16:creationId xmlns:a16="http://schemas.microsoft.com/office/drawing/2014/main" id="{DFC1FBB3-25BA-9E9E-942E-6153F9ADE073}"/>
+              </a:ext>
+            </a:extLst>
+          </p:cNvPr>
+          <p:cNvSpPr/>
+          <p:nvPr/>
+        </p:nvSpPr>
+        <p:spPr>
+          <a:xfrm>
+            <a:off x="1765275" y="4429665"/>
+            <a:ext cx="119661" cy="119661"/>
+          </a:xfrm>
+          <a:prstGeom prst="ellipse">
+            <a:avLst/>
+          </a:prstGeom>
+          <a:noFill/>
+          <a:ln w="38100">
+            <a:solidFill>
+              <a:schemeClr val="tx1"/>
+            </a:solidFill>
+          </a:ln>
+        </p:spPr>
+        <p:style>
+          <a:lnRef idx="2">
+            <a:schemeClr val="accent1">
+              <a:shade val="15000"/>
+            </a:schemeClr>
+          </a:lnRef>
+          <a:fillRef idx="1">
+            <a:schemeClr val="accent1"/>
+          </a:fillRef>
+          <a:effectRef idx="0">
+            <a:schemeClr val="accent1"/>
+          </a:effectRef>
+          <a:fontRef idx="minor">
+            <a:schemeClr val="lt1"/>
+          </a:fontRef>
+        </p:style>
+        <p:txBody>
+          <a:bodyPr rtlCol="0" anchor="ctr"/>
+          <a:lstStyle/>
+          <a:p>
+            <a:pPr algn="ctr"/>
+            <a:endParaRPr lang="en-US"/>
+          </a:p>
+        </p:txBody>
+      </p:sp>
+      <p:pic>
+        <p:nvPicPr>
+          <p:cNvPr id="168" name="Graphic 167">
+            <a:extLst>
+              <a:ext uri="{FF2B5EF4-FFF2-40B4-BE49-F238E27FC236}">
+                <a16:creationId xmlns:a16="http://schemas.microsoft.com/office/drawing/2014/main" id="{4B40AF14-2121-35AE-836B-1CE8D34AAA7A}"/>
+              </a:ext>
+            </a:extLst>
+          </p:cNvPr>
+          <p:cNvPicPr>
+            <a:picLocks noChangeAspect="1"/>
+          </p:cNvPicPr>
+          <p:nvPr/>
+        </p:nvPicPr>
+        <p:blipFill>
+          <a:blip>
+            <a:extLst>
+              <a:ext uri="{96DAC541-7B7A-43D3-8B79-37D633B846F1}">
+                <asvg:svgBlip xmlns:asvg="http://schemas.microsoft.com/office/drawing/2016/SVG/main" r:embed="rId3"/>
+              </a:ext>
+            </a:extLst>
+          </a:blip>
+          <a:stretch>
+            <a:fillRect/>
+          </a:stretch>
+        </p:blipFill>
+        <p:spPr>
+          <a:xfrm>
+            <a:off x="-693028" y="3108518"/>
+            <a:ext cx="104775" cy="238125"/>
+          </a:xfrm>
+          <a:prstGeom prst="rect">
+            <a:avLst/>
+          </a:prstGeom>
+        </p:spPr>
+      </p:pic>
+      <p:pic>
+        <p:nvPicPr>
+          <p:cNvPr id="170" name="Graphic 169">
+            <a:extLst>
+              <a:ext uri="{FF2B5EF4-FFF2-40B4-BE49-F238E27FC236}">
+                <a16:creationId xmlns:a16="http://schemas.microsoft.com/office/drawing/2014/main" id="{7D71D22C-F6FB-C7EA-6962-2DFFC91CCA63}"/>
+              </a:ext>
+            </a:extLst>
+          </p:cNvPr>
+          <p:cNvPicPr>
+            <a:picLocks noChangeAspect="1"/>
+          </p:cNvPicPr>
+          <p:nvPr/>
+        </p:nvPicPr>
+        <p:blipFill>
+          <a:blip>
+            <a:extLst>
+              <a:ext uri="{96DAC541-7B7A-43D3-8B79-37D633B846F1}">
+                <asvg:svgBlip xmlns:asvg="http://schemas.microsoft.com/office/drawing/2016/SVG/main" r:embed="rId4"/>
+              </a:ext>
+            </a:extLst>
+          </a:blip>
+          <a:stretch>
+            <a:fillRect/>
+          </a:stretch>
+        </p:blipFill>
+        <p:spPr>
+          <a:xfrm>
+            <a:off x="6641411" y="1948402"/>
+            <a:ext cx="142875" cy="238125"/>
+          </a:xfrm>
+          <a:prstGeom prst="rect">
+            <a:avLst/>
+          </a:prstGeom>
+        </p:spPr>
+      </p:pic>
+      <p:pic>
+        <p:nvPicPr>
+          <p:cNvPr id="172" name="Graphic 171">
+            <a:extLst>
+              <a:ext uri="{FF2B5EF4-FFF2-40B4-BE49-F238E27FC236}">
+                <a16:creationId xmlns:a16="http://schemas.microsoft.com/office/drawing/2014/main" id="{695A3CFE-EF5B-97C4-889E-EC4A4E140567}"/>
+              </a:ext>
+            </a:extLst>
+          </p:cNvPr>
+          <p:cNvPicPr>
+            <a:picLocks noChangeAspect="1"/>
+          </p:cNvPicPr>
+          <p:nvPr/>
+        </p:nvPicPr>
+        <p:blipFill>
+          <a:blip>
+            <a:extLst>
+              <a:ext uri="{96DAC541-7B7A-43D3-8B79-37D633B846F1}">
+                <asvg:svgBlip xmlns:asvg="http://schemas.microsoft.com/office/drawing/2016/SVG/main" r:embed="rId5"/>
+              </a:ext>
+            </a:extLst>
+          </a:blip>
+          <a:stretch>
+            <a:fillRect/>
+          </a:stretch>
+        </p:blipFill>
+        <p:spPr>
+          <a:xfrm>
+            <a:off x="7055076" y="0"/>
+            <a:ext cx="142875" cy="247650"/>
+          </a:xfrm>
+          <a:prstGeom prst="rect">
+            <a:avLst/>
+          </a:prstGeom>
+        </p:spPr>
+      </p:pic>
+      <p:pic>
+        <p:nvPicPr>
+          <p:cNvPr id="174" name="Graphic 173">
+            <a:extLst>
+              <a:ext uri="{FF2B5EF4-FFF2-40B4-BE49-F238E27FC236}">
+                <a16:creationId xmlns:a16="http://schemas.microsoft.com/office/drawing/2014/main" id="{94C2E7E6-FBF9-E37F-BE5D-AA3CFCC9B2B7}"/>
+              </a:ext>
+            </a:extLst>
+          </p:cNvPr>
+          <p:cNvPicPr>
+            <a:picLocks noChangeAspect="1"/>
+          </p:cNvPicPr>
+          <p:nvPr/>
+        </p:nvPicPr>
+        <p:blipFill>
+          <a:blip>
+            <a:extLst>
+              <a:ext uri="{96DAC541-7B7A-43D3-8B79-37D633B846F1}">
+                <asvg:svgBlip xmlns:asvg="http://schemas.microsoft.com/office/drawing/2016/SVG/main" r:embed="rId6"/>
+              </a:ext>
+            </a:extLst>
+          </a:blip>
+          <a:stretch>
+            <a:fillRect/>
+          </a:stretch>
+        </p:blipFill>
+        <p:spPr>
+          <a:xfrm>
+            <a:off x="5844241" y="325088"/>
+            <a:ext cx="133350" cy="238125"/>
+          </a:xfrm>
+          <a:prstGeom prst="rect">
+            <a:avLst/>
+          </a:prstGeom>
+        </p:spPr>
+      </p:pic>
+      <p:pic>
+        <p:nvPicPr>
+          <p:cNvPr id="176" name="Graphic 175">
+            <a:extLst>
+              <a:ext uri="{FF2B5EF4-FFF2-40B4-BE49-F238E27FC236}">
+                <a16:creationId xmlns:a16="http://schemas.microsoft.com/office/drawing/2014/main" id="{CBAE6366-3795-8B47-2D09-5231E6A4FEDD}"/>
+              </a:ext>
+            </a:extLst>
+          </p:cNvPr>
+          <p:cNvPicPr>
+            <a:picLocks noChangeAspect="1"/>
+          </p:cNvPicPr>
+          <p:nvPr/>
+        </p:nvPicPr>
+        <p:blipFill>
+          <a:blip>
+            <a:extLst>
+              <a:ext uri="{96DAC541-7B7A-43D3-8B79-37D633B846F1}">
+                <asvg:svgBlip xmlns:asvg="http://schemas.microsoft.com/office/drawing/2016/SVG/main" r:embed="rId7"/>
+              </a:ext>
+            </a:extLst>
+          </a:blip>
+          <a:stretch>
+            <a:fillRect/>
+          </a:stretch>
+        </p:blipFill>
+        <p:spPr>
+          <a:xfrm>
+            <a:off x="6628650" y="1139054"/>
+            <a:ext cx="133350" cy="238125"/>
+          </a:xfrm>
+          <a:prstGeom prst="rect">
+            <a:avLst/>
+          </a:prstGeom>
+        </p:spPr>
+      </p:pic>
+      <p:pic>
+        <p:nvPicPr>
+          <p:cNvPr id="178" name="Graphic 177">
+            <a:extLst>
+              <a:ext uri="{FF2B5EF4-FFF2-40B4-BE49-F238E27FC236}">
+                <a16:creationId xmlns:a16="http://schemas.microsoft.com/office/drawing/2014/main" id="{3F0F7F11-7D22-66C9-49B9-1A129DCDC9BF}"/>
+              </a:ext>
+            </a:extLst>
+          </p:cNvPr>
+          <p:cNvPicPr>
+            <a:picLocks noChangeAspect="1"/>
+          </p:cNvPicPr>
+          <p:nvPr/>
+        </p:nvPicPr>
+        <p:blipFill>
+          <a:blip>
+            <a:extLst>
+              <a:ext uri="{96DAC541-7B7A-43D3-8B79-37D633B846F1}">
+                <asvg:svgBlip xmlns:asvg="http://schemas.microsoft.com/office/drawing/2016/SVG/main" r:embed="rId8"/>
+              </a:ext>
+            </a:extLst>
+          </a:blip>
+          <a:stretch>
+            <a:fillRect/>
+          </a:stretch>
+        </p:blipFill>
+        <p:spPr>
+          <a:xfrm>
+            <a:off x="6899835" y="3561686"/>
+            <a:ext cx="152400" cy="238125"/>
+          </a:xfrm>
+          <a:prstGeom prst="rect">
+            <a:avLst/>
+          </a:prstGeom>
+        </p:spPr>
+      </p:pic>
+      <p:pic>
+        <p:nvPicPr>
+          <p:cNvPr id="180" name="Graphic 179">
+            <a:extLst>
+              <a:ext uri="{FF2B5EF4-FFF2-40B4-BE49-F238E27FC236}">
+                <a16:creationId xmlns:a16="http://schemas.microsoft.com/office/drawing/2014/main" id="{B64276A5-EDE3-CF4D-4921-7459EBC3A7B7}"/>
+              </a:ext>
+            </a:extLst>
+          </p:cNvPr>
+          <p:cNvPicPr>
+            <a:picLocks noChangeAspect="1"/>
+          </p:cNvPicPr>
+          <p:nvPr/>
+        </p:nvPicPr>
+        <p:blipFill>
+          <a:blip>
+            <a:extLst>
+              <a:ext uri="{96DAC541-7B7A-43D3-8B79-37D633B846F1}">
+                <asvg:svgBlip xmlns:asvg="http://schemas.microsoft.com/office/drawing/2016/SVG/main" r:embed="rId9"/>
+              </a:ext>
+            </a:extLst>
+          </a:blip>
+          <a:stretch>
+            <a:fillRect/>
+          </a:stretch>
+        </p:blipFill>
+        <p:spPr>
+          <a:xfrm>
+            <a:off x="-721922" y="3561685"/>
+            <a:ext cx="142875" cy="238125"/>
+          </a:xfrm>
+          <a:prstGeom prst="rect">
+            <a:avLst/>
+          </a:prstGeom>
+        </p:spPr>
+      </p:pic>
+      <p:pic>
+        <p:nvPicPr>
+          <p:cNvPr id="182" name="Graphic 181">
+            <a:extLst>
+              <a:ext uri="{FF2B5EF4-FFF2-40B4-BE49-F238E27FC236}">
+                <a16:creationId xmlns:a16="http://schemas.microsoft.com/office/drawing/2014/main" id="{F801EC20-15B7-D9D3-2C95-3805669D2DA2}"/>
+              </a:ext>
+            </a:extLst>
+          </p:cNvPr>
+          <p:cNvPicPr>
+            <a:picLocks noChangeAspect="1"/>
+          </p:cNvPicPr>
+          <p:nvPr/>
+        </p:nvPicPr>
+        <p:blipFill>
+          <a:blip>
+            <a:extLst>
+              <a:ext uri="{96DAC541-7B7A-43D3-8B79-37D633B846F1}">
+                <asvg:svgBlip xmlns:asvg="http://schemas.microsoft.com/office/drawing/2016/SVG/main" r:embed="rId10"/>
+              </a:ext>
+            </a:extLst>
+          </a:blip>
+          <a:stretch>
+            <a:fillRect/>
+          </a:stretch>
+        </p:blipFill>
+        <p:spPr>
+          <a:xfrm>
+            <a:off x="6912990" y="3097018"/>
+            <a:ext cx="133350" cy="238125"/>
+          </a:xfrm>
+          <a:prstGeom prst="rect">
+            <a:avLst/>
+          </a:prstGeom>
+        </p:spPr>
+      </p:pic>
+      <p:pic>
+        <p:nvPicPr>
+          <p:cNvPr id="184" name="Graphic 183">
+            <a:extLst>
+              <a:ext uri="{FF2B5EF4-FFF2-40B4-BE49-F238E27FC236}">
+                <a16:creationId xmlns:a16="http://schemas.microsoft.com/office/drawing/2014/main" id="{4842ED59-C07A-E57D-0B17-4833D613C6DF}"/>
+              </a:ext>
+            </a:extLst>
+          </p:cNvPr>
+          <p:cNvPicPr>
+            <a:picLocks noChangeAspect="1"/>
+          </p:cNvPicPr>
+          <p:nvPr/>
+        </p:nvPicPr>
+        <p:blipFill>
+          <a:blip>
+            <a:extLst>
+              <a:ext uri="{96DAC541-7B7A-43D3-8B79-37D633B846F1}">
+                <asvg:svgBlip xmlns:asvg="http://schemas.microsoft.com/office/drawing/2016/SVG/main" r:embed="rId11"/>
+              </a:ext>
+            </a:extLst>
+          </a:blip>
+          <a:stretch>
+            <a:fillRect/>
+          </a:stretch>
+        </p:blipFill>
+        <p:spPr>
+          <a:xfrm>
+            <a:off x="-168745" y="2769173"/>
+            <a:ext cx="381000" cy="371475"/>
+          </a:xfrm>
+          <a:prstGeom prst="rect">
+            <a:avLst/>
+          </a:prstGeom>
+        </p:spPr>
+      </p:pic>
+      <p:pic>
+        <p:nvPicPr>
+          <p:cNvPr id="186" name="Graphic 185">
+            <a:extLst>
+              <a:ext uri="{FF2B5EF4-FFF2-40B4-BE49-F238E27FC236}">
+                <a16:creationId xmlns:a16="http://schemas.microsoft.com/office/drawing/2014/main" id="{94F1E0E9-FCFA-C149-1CF5-7F5B902E5F72}"/>
+              </a:ext>
+            </a:extLst>
+          </p:cNvPr>
+          <p:cNvPicPr>
+            <a:picLocks noChangeAspect="1"/>
+          </p:cNvPicPr>
+          <p:nvPr/>
+        </p:nvPicPr>
+        <p:blipFill>
+          <a:blip>
+            <a:extLst>
+              <a:ext uri="{96DAC541-7B7A-43D3-8B79-37D633B846F1}">
+                <asvg:svgBlip xmlns:asvg="http://schemas.microsoft.com/office/drawing/2016/SVG/main" r:embed="rId12"/>
+              </a:ext>
+            </a:extLst>
+          </a:blip>
+          <a:stretch>
+            <a:fillRect/>
+          </a:stretch>
+        </p:blipFill>
+        <p:spPr>
+          <a:xfrm>
+            <a:off x="1974220" y="2636249"/>
+            <a:ext cx="390525" cy="371475"/>
+          </a:xfrm>
+          <a:prstGeom prst="rect">
+            <a:avLst/>
+          </a:prstGeom>
+        </p:spPr>
+      </p:pic>
+      <p:pic>
+        <p:nvPicPr>
+          <p:cNvPr id="188" name="Graphic 187">
+            <a:extLst>
+              <a:ext uri="{FF2B5EF4-FFF2-40B4-BE49-F238E27FC236}">
+                <a16:creationId xmlns:a16="http://schemas.microsoft.com/office/drawing/2014/main" id="{88B928DC-1F85-D061-D0AC-4C022AF9BA4C}"/>
+              </a:ext>
+            </a:extLst>
+          </p:cNvPr>
+          <p:cNvPicPr>
+            <a:picLocks noChangeAspect="1"/>
+          </p:cNvPicPr>
+          <p:nvPr/>
+        </p:nvPicPr>
+        <p:blipFill>
+          <a:blip>
+            <a:extLst>
+              <a:ext uri="{96DAC541-7B7A-43D3-8B79-37D633B846F1}">
+                <asvg:svgBlip xmlns:asvg="http://schemas.microsoft.com/office/drawing/2016/SVG/main" r:embed="rId13"/>
+              </a:ext>
+            </a:extLst>
+          </a:blip>
+          <a:stretch>
+            <a:fillRect/>
+          </a:stretch>
+        </p:blipFill>
+        <p:spPr>
+          <a:xfrm>
+            <a:off x="1974220" y="3870409"/>
+            <a:ext cx="457200" cy="371475"/>
+          </a:xfrm>
+          <a:prstGeom prst="rect">
+            <a:avLst/>
+          </a:prstGeom>
+        </p:spPr>
+      </p:pic>
+      <p:pic>
+        <p:nvPicPr>
+          <p:cNvPr id="190" name="Graphic 189">
+            <a:extLst>
+              <a:ext uri="{FF2B5EF4-FFF2-40B4-BE49-F238E27FC236}">
+                <a16:creationId xmlns:a16="http://schemas.microsoft.com/office/drawing/2014/main" id="{B0BCEFC6-E6C9-9B14-E79B-2657530A112F}"/>
+              </a:ext>
+            </a:extLst>
+          </p:cNvPr>
+          <p:cNvPicPr>
+            <a:picLocks noChangeAspect="1"/>
+          </p:cNvPicPr>
+          <p:nvPr/>
+        </p:nvPicPr>
+        <p:blipFill>
+          <a:blip>
+            <a:extLst>
+              <a:ext uri="{96DAC541-7B7A-43D3-8B79-37D633B846F1}">
+                <asvg:svgBlip xmlns:asvg="http://schemas.microsoft.com/office/drawing/2016/SVG/main" r:embed="rId14"/>
+              </a:ext>
+            </a:extLst>
+          </a:blip>
+          <a:stretch>
+            <a:fillRect/>
+          </a:stretch>
+        </p:blipFill>
+        <p:spPr>
+          <a:xfrm>
+            <a:off x="-238118" y="3926806"/>
+            <a:ext cx="447675" cy="371475"/>
+          </a:xfrm>
+          <a:prstGeom prst="rect">
+            <a:avLst/>
+          </a:prstGeom>
+        </p:spPr>
+      </p:pic>
+      <p:sp>
+        <p:nvSpPr>
+          <p:cNvPr id="193" name="Isosceles Triangle 192">
+            <a:extLst>
+              <a:ext uri="{FF2B5EF4-FFF2-40B4-BE49-F238E27FC236}">
+                <a16:creationId xmlns:a16="http://schemas.microsoft.com/office/drawing/2014/main" id="{779BA644-EEA1-7B2A-B452-89B4F4D4CBEA}"/>
+              </a:ext>
+            </a:extLst>
+          </p:cNvPr>
+          <p:cNvSpPr/>
+          <p:nvPr/>
+        </p:nvSpPr>
+        <p:spPr>
+          <a:xfrm rot="5400000">
+            <a:off x="2096484" y="2356913"/>
+            <a:ext cx="184549" cy="180974"/>
+          </a:xfrm>
+          <a:prstGeom prst="triangle">
+            <a:avLst/>
+          </a:prstGeom>
+          <a:solidFill>
+            <a:srgbClr val="FF0000"/>
+          </a:solidFill>
+          <a:ln>
+            <a:noFill/>
+          </a:ln>
+        </p:spPr>
+        <p:style>
+          <a:lnRef idx="2">
+            <a:schemeClr val="accent1">
+              <a:shade val="15000"/>
+            </a:schemeClr>
+          </a:lnRef>
+          <a:fillRef idx="1">
+            <a:schemeClr val="accent1"/>
+          </a:fillRef>
+          <a:effectRef idx="0">
+            <a:schemeClr val="accent1"/>
+          </a:effectRef>
+          <a:fontRef idx="minor">
+            <a:schemeClr val="lt1"/>
+          </a:fontRef>
+        </p:style>
+        <p:txBody>
+          <a:bodyPr rtlCol="0" anchor="ctr"/>
+          <a:lstStyle/>
+          <a:p>
+            <a:pPr algn="ctr"/>
+            <a:endParaRPr lang="en-US"/>
+          </a:p>
+        </p:txBody>
+      </p:sp>
+      <p:sp>
+        <p:nvSpPr>
+          <p:cNvPr id="195" name="Isosceles Triangle 194">
+            <a:extLst>
+              <a:ext uri="{FF2B5EF4-FFF2-40B4-BE49-F238E27FC236}">
+                <a16:creationId xmlns:a16="http://schemas.microsoft.com/office/drawing/2014/main" id="{CB129FDD-51BE-09EA-30F9-292ECFFEA61D}"/>
+              </a:ext>
+            </a:extLst>
+          </p:cNvPr>
+          <p:cNvSpPr/>
+          <p:nvPr/>
+        </p:nvSpPr>
+        <p:spPr>
+          <a:xfrm rot="5400000">
+            <a:off x="2096278" y="4392088"/>
+            <a:ext cx="184549" cy="180974"/>
+          </a:xfrm>
+          <a:prstGeom prst="triangle">
+            <a:avLst/>
+          </a:prstGeom>
+          <a:solidFill>
+            <a:srgbClr val="FF0000"/>
+          </a:solidFill>
+          <a:ln>
+            <a:noFill/>
+          </a:ln>
+        </p:spPr>
+        <p:style>
+          <a:lnRef idx="2">
+            <a:schemeClr val="accent1">
+              <a:shade val="15000"/>
+            </a:schemeClr>
+          </a:lnRef>
+          <a:fillRef idx="1">
+            <a:schemeClr val="accent1"/>
+          </a:fillRef>
+          <a:effectRef idx="0">
+            <a:schemeClr val="accent1"/>
+          </a:effectRef>
+          <a:fontRef idx="minor">
+            <a:schemeClr val="lt1"/>
+          </a:fontRef>
+        </p:style>
+        <p:txBody>
+          <a:bodyPr rtlCol="0" anchor="ctr"/>
+          <a:lstStyle/>
+          <a:p>
+            <a:pPr algn="ctr"/>
+            <a:endParaRPr lang="en-US"/>
+          </a:p>
+        </p:txBody>
+      </p:sp>
+      <p:sp>
+        <p:nvSpPr>
+          <p:cNvPr id="197" name="Isosceles Triangle 196">
+            <a:extLst>
+              <a:ext uri="{FF2B5EF4-FFF2-40B4-BE49-F238E27FC236}">
+                <a16:creationId xmlns:a16="http://schemas.microsoft.com/office/drawing/2014/main" id="{99777AF8-44EF-459F-999F-6EEBDB55A506}"/>
+              </a:ext>
+            </a:extLst>
+          </p:cNvPr>
+          <p:cNvSpPr/>
+          <p:nvPr/>
+        </p:nvSpPr>
+        <p:spPr>
+          <a:xfrm rot="5400000">
+            <a:off x="31734" y="3139550"/>
+            <a:ext cx="184549" cy="180974"/>
+          </a:xfrm>
+          <a:prstGeom prst="triangle">
+            <a:avLst/>
+          </a:prstGeom>
+          <a:solidFill>
+            <a:srgbClr val="FF0000"/>
+          </a:solidFill>
+          <a:ln>
+            <a:noFill/>
+          </a:ln>
+        </p:spPr>
+        <p:style>
+          <a:lnRef idx="2">
+            <a:schemeClr val="accent1">
+              <a:shade val="15000"/>
+            </a:schemeClr>
+          </a:lnRef>
+          <a:fillRef idx="1">
+            <a:schemeClr val="accent1"/>
+          </a:fillRef>
+          <a:effectRef idx="0">
+            <a:schemeClr val="accent1"/>
+          </a:effectRef>
+          <a:fontRef idx="minor">
+            <a:schemeClr val="lt1"/>
+          </a:fontRef>
+        </p:style>
+        <p:txBody>
+          <a:bodyPr rtlCol="0" anchor="ctr"/>
+          <a:lstStyle/>
+          <a:p>
+            <a:pPr algn="ctr"/>
+            <a:endParaRPr lang="en-US"/>
+          </a:p>
+        </p:txBody>
+      </p:sp>
+      <p:sp>
+        <p:nvSpPr>
+          <p:cNvPr id="199" name="Isosceles Triangle 198">
+            <a:extLst>
+              <a:ext uri="{FF2B5EF4-FFF2-40B4-BE49-F238E27FC236}">
+                <a16:creationId xmlns:a16="http://schemas.microsoft.com/office/drawing/2014/main" id="{78C01E31-3FEB-1874-3E13-5D3F927834EF}"/>
+              </a:ext>
+            </a:extLst>
+          </p:cNvPr>
+          <p:cNvSpPr/>
+          <p:nvPr/>
+        </p:nvSpPr>
+        <p:spPr>
+          <a:xfrm rot="16200000" flipH="1">
+            <a:off x="10302" y="3589604"/>
+            <a:ext cx="184549" cy="180974"/>
+          </a:xfrm>
+          <a:prstGeom prst="triangle">
+            <a:avLst/>
+          </a:prstGeom>
+          <a:solidFill>
+            <a:srgbClr val="FF0000"/>
+          </a:solidFill>
+          <a:ln>
+            <a:noFill/>
+          </a:ln>
+        </p:spPr>
+        <p:style>
+          <a:lnRef idx="2">
+            <a:schemeClr val="accent1">
+              <a:shade val="15000"/>
+            </a:schemeClr>
+          </a:lnRef>
+          <a:fillRef idx="1">
+            <a:schemeClr val="accent1"/>
+          </a:fillRef>
+          <a:effectRef idx="0">
+            <a:schemeClr val="accent1"/>
+          </a:effectRef>
+          <a:fontRef idx="minor">
+            <a:schemeClr val="lt1"/>
+          </a:fontRef>
+        </p:style>
+        <p:txBody>
+          <a:bodyPr rtlCol="0" anchor="ctr"/>
+          <a:lstStyle/>
+          <a:p>
+            <a:pPr algn="ctr"/>
+            <a:endParaRPr lang="en-US"/>
+          </a:p>
+        </p:txBody>
+      </p:sp>
+      <p:sp>
+        <p:nvSpPr>
+          <p:cNvPr id="201" name="Isosceles Triangle 200">
+            <a:extLst>
+              <a:ext uri="{FF2B5EF4-FFF2-40B4-BE49-F238E27FC236}">
+                <a16:creationId xmlns:a16="http://schemas.microsoft.com/office/drawing/2014/main" id="{C8C98345-8E65-3FAC-ABEA-1422F68E9894}"/>
+              </a:ext>
+            </a:extLst>
+          </p:cNvPr>
+          <p:cNvSpPr/>
+          <p:nvPr/>
+        </p:nvSpPr>
+        <p:spPr>
+          <a:xfrm rot="16200000" flipH="1">
+            <a:off x="2074188" y="3574525"/>
+            <a:ext cx="184549" cy="180974"/>
+          </a:xfrm>
+          <a:prstGeom prst="triangle">
+            <a:avLst/>
+          </a:prstGeom>
+          <a:solidFill>
+            <a:srgbClr val="FF0000"/>
+          </a:solidFill>
+          <a:ln>
+            <a:noFill/>
+          </a:ln>
+        </p:spPr>
+        <p:style>
+          <a:lnRef idx="2">
+            <a:schemeClr val="accent1">
+              <a:shade val="15000"/>
+            </a:schemeClr>
+          </a:lnRef>
+          <a:fillRef idx="1">
+            <a:schemeClr val="accent1"/>
+          </a:fillRef>
+          <a:effectRef idx="0">
+            <a:schemeClr val="accent1"/>
+          </a:effectRef>
+          <a:fontRef idx="minor">
+            <a:schemeClr val="lt1"/>
+          </a:fontRef>
+        </p:style>
+        <p:txBody>
+          <a:bodyPr rtlCol="0" anchor="ctr"/>
+          <a:lstStyle/>
+          <a:p>
+            <a:pPr algn="ctr"/>
+            <a:endParaRPr lang="en-US"/>
+          </a:p>
+        </p:txBody>
+      </p:sp>
+      <p:sp>
+        <p:nvSpPr>
+          <p:cNvPr id="205" name="Isosceles Triangle 204">
+            <a:extLst>
+              <a:ext uri="{FF2B5EF4-FFF2-40B4-BE49-F238E27FC236}">
+                <a16:creationId xmlns:a16="http://schemas.microsoft.com/office/drawing/2014/main" id="{B0533624-E2F4-8394-1586-90EC3FF9C259}"/>
+              </a:ext>
+            </a:extLst>
+          </p:cNvPr>
+          <p:cNvSpPr/>
+          <p:nvPr/>
+        </p:nvSpPr>
+        <p:spPr>
+          <a:xfrm rot="16200000" flipH="1">
+            <a:off x="2074189" y="3172886"/>
+            <a:ext cx="184549" cy="180974"/>
+          </a:xfrm>
+          <a:prstGeom prst="triangle">
+            <a:avLst/>
+          </a:prstGeom>
+          <a:solidFill>
+            <a:srgbClr val="FF0000"/>
+          </a:solidFill>
+          <a:ln>
+            <a:noFill/>
+          </a:ln>
+        </p:spPr>
+        <p:style>
+          <a:lnRef idx="2">
+            <a:schemeClr val="accent1">
+              <a:shade val="15000"/>
+            </a:schemeClr>
+          </a:lnRef>
+          <a:fillRef idx="1">
+            <a:schemeClr val="accent1"/>
+          </a:fillRef>
+          <a:effectRef idx="0">
+            <a:schemeClr val="accent1"/>
+          </a:effectRef>
+          <a:fontRef idx="minor">
+            <a:schemeClr val="lt1"/>
+          </a:fontRef>
+        </p:style>
+        <p:txBody>
+          <a:bodyPr rtlCol="0" anchor="ctr"/>
+          <a:lstStyle/>
+          <a:p>
+            <a:pPr algn="ctr"/>
+            <a:endParaRPr lang="en-US"/>
+          </a:p>
+        </p:txBody>
+      </p:sp>
+      <p:sp>
+        <p:nvSpPr>
+          <p:cNvPr id="207" name="Isosceles Triangle 206">
+            <a:extLst>
+              <a:ext uri="{FF2B5EF4-FFF2-40B4-BE49-F238E27FC236}">
+                <a16:creationId xmlns:a16="http://schemas.microsoft.com/office/drawing/2014/main" id="{23ACFBA7-F54D-9F84-EF47-229EC48E6DCB}"/>
+              </a:ext>
+            </a:extLst>
+          </p:cNvPr>
+          <p:cNvSpPr/>
+          <p:nvPr/>
+        </p:nvSpPr>
+        <p:spPr>
+          <a:xfrm rot="16200000" flipH="1">
+            <a:off x="6160892" y="3591034"/>
+            <a:ext cx="184549" cy="180974"/>
+          </a:xfrm>
+          <a:prstGeom prst="triangle">
+            <a:avLst/>
+          </a:prstGeom>
+          <a:solidFill>
+            <a:srgbClr val="FF0000"/>
+          </a:solidFill>
+          <a:ln>
+            <a:noFill/>
+          </a:ln>
+        </p:spPr>
+        <p:style>
+          <a:lnRef idx="2">
+            <a:schemeClr val="accent1">
+              <a:shade val="15000"/>
+            </a:schemeClr>
+          </a:lnRef>
+          <a:fillRef idx="1">
+            <a:schemeClr val="accent1"/>
+          </a:fillRef>
+          <a:effectRef idx="0">
+            <a:schemeClr val="accent1"/>
+          </a:effectRef>
+          <a:fontRef idx="minor">
+            <a:schemeClr val="lt1"/>
+          </a:fontRef>
+        </p:style>
+        <p:txBody>
+          <a:bodyPr rtlCol="0" anchor="ctr"/>
+          <a:lstStyle/>
+          <a:p>
+            <a:pPr algn="ctr"/>
+            <a:endParaRPr lang="en-US"/>
+          </a:p>
+        </p:txBody>
+      </p:sp>
+      <p:sp>
+        <p:nvSpPr>
+          <p:cNvPr id="209" name="Isosceles Triangle 208">
+            <a:extLst>
+              <a:ext uri="{FF2B5EF4-FFF2-40B4-BE49-F238E27FC236}">
+                <a16:creationId xmlns:a16="http://schemas.microsoft.com/office/drawing/2014/main" id="{B3F5C310-B3EE-BBCA-D7A4-5DDD6AF51223}"/>
+              </a:ext>
+            </a:extLst>
+          </p:cNvPr>
+          <p:cNvSpPr/>
+          <p:nvPr/>
+        </p:nvSpPr>
+        <p:spPr>
+          <a:xfrm rot="5400000">
+            <a:off x="6189854" y="3135917"/>
+            <a:ext cx="184549" cy="180974"/>
+          </a:xfrm>
+          <a:prstGeom prst="triangle">
+            <a:avLst/>
+          </a:prstGeom>
+          <a:solidFill>
+            <a:srgbClr val="FF0000"/>
+          </a:solidFill>
+          <a:ln>
+            <a:noFill/>
+          </a:ln>
+        </p:spPr>
+        <p:style>
+          <a:lnRef idx="2">
+            <a:schemeClr val="accent1">
+              <a:shade val="15000"/>
+            </a:schemeClr>
+          </a:lnRef>
+          <a:fillRef idx="1">
+            <a:schemeClr val="accent1"/>
+          </a:fillRef>
+          <a:effectRef idx="0">
+            <a:schemeClr val="accent1"/>
+          </a:effectRef>
+          <a:fontRef idx="minor">
+            <a:schemeClr val="lt1"/>
+          </a:fontRef>
+        </p:style>
+        <p:txBody>
+          <a:bodyPr rtlCol="0" anchor="ctr"/>
+          <a:lstStyle/>
+          <a:p>
+            <a:pPr algn="ctr"/>
+            <a:endParaRPr lang="en-US"/>
+          </a:p>
+        </p:txBody>
+      </p:sp>
+      <p:cxnSp>
+        <p:nvCxnSpPr>
+          <p:cNvPr id="211" name="Straight Arrow Connector 210">
+            <a:extLst>
+              <a:ext uri="{FF2B5EF4-FFF2-40B4-BE49-F238E27FC236}">
+                <a16:creationId xmlns:a16="http://schemas.microsoft.com/office/drawing/2014/main" id="{556B909A-3924-BD53-62AD-1FE427803C98}"/>
+              </a:ext>
+            </a:extLst>
+          </p:cNvPr>
+          <p:cNvCxnSpPr/>
+          <p:nvPr/>
+        </p:nvCxnSpPr>
+        <p:spPr>
+          <a:xfrm flipV="1">
+            <a:off x="3365500" y="1948402"/>
+            <a:ext cx="0" cy="2877598"/>
+          </a:xfrm>
+          <a:prstGeom prst="straightConnector1">
+            <a:avLst/>
+          </a:prstGeom>
+          <a:ln>
+            <a:solidFill>
+              <a:srgbClr val="FF0000"/>
+            </a:solidFill>
+            <a:tailEnd type="triangle"/>
+          </a:ln>
+        </p:spPr>
+        <p:style>
+          <a:lnRef idx="2">
+            <a:schemeClr val="accent1"/>
+          </a:lnRef>
+          <a:fillRef idx="0">
+            <a:schemeClr val="accent1"/>
+          </a:fillRef>
+          <a:effectRef idx="1">
+            <a:schemeClr val="accent1"/>
+          </a:effectRef>
+          <a:fontRef idx="minor">
+            <a:schemeClr val="tx1"/>
+          </a:fontRef>
+        </p:style>
+      </p:cxnSp>
+      <p:cxnSp>
+        <p:nvCxnSpPr>
+          <p:cNvPr id="212" name="Straight Arrow Connector 211">
+            <a:extLst>
+              <a:ext uri="{FF2B5EF4-FFF2-40B4-BE49-F238E27FC236}">
+                <a16:creationId xmlns:a16="http://schemas.microsoft.com/office/drawing/2014/main" id="{F985ADC7-BFD3-7D11-6E99-76F82E9FC98C}"/>
+              </a:ext>
+            </a:extLst>
+          </p:cNvPr>
+          <p:cNvCxnSpPr/>
+          <p:nvPr/>
+        </p:nvCxnSpPr>
+        <p:spPr>
+          <a:xfrm flipV="1">
+            <a:off x="3517900" y="2100802"/>
+            <a:ext cx="0" cy="2877598"/>
+          </a:xfrm>
+          <a:prstGeom prst="straightConnector1">
+            <a:avLst/>
+          </a:prstGeom>
+          <a:ln>
+            <a:solidFill>
+              <a:srgbClr val="FF0000"/>
+            </a:solidFill>
+            <a:tailEnd type="triangle"/>
+          </a:ln>
+        </p:spPr>
+        <p:style>
+          <a:lnRef idx="2">
+            <a:schemeClr val="accent1"/>
+          </a:lnRef>
+          <a:fillRef idx="0">
+            <a:schemeClr val="accent1"/>
+          </a:fillRef>
+          <a:effectRef idx="1">
+            <a:schemeClr val="accent1"/>
+          </a:effectRef>
+          <a:fontRef idx="minor">
+            <a:schemeClr val="tx1"/>
+          </a:fontRef>
+        </p:style>
+      </p:cxnSp>
+    </p:spTree>
+    <p:extLst>
+      <p:ext uri="{BB962C8B-B14F-4D97-AF65-F5344CB8AC3E}">
+        <p14:creationId xmlns:p14="http://schemas.microsoft.com/office/powerpoint/2010/main" val="455210083"/>
+      </p:ext>
+    </p:extLst>
+  </p:cSld>
+  <p:clrMapOvr>
+    <a:masterClrMapping/>
+  </p:clrMapOvr>
+</p:sld>
+</file>
+
 <file path=ppt/theme/theme1.xml><?xml version="1.0" encoding="utf-8"?>
 <a:theme xmlns:a="http://schemas.openxmlformats.org/drawingml/2006/main" name="Office Theme">
   <a:themeElements>

--- a/Karl_Major Revision/Figures_v2/Trans_figures.pptx
+++ b/Karl_Major Revision/Figures_v2/Trans_figures.pptx
@@ -328,7 +328,7 @@
           <a:p>
             <a:fld id="{18AFD033-9734-4099-AB24-E002C0C94B93}" type="datetimeFigureOut">
               <a:rPr lang="en-US" smtClean="0"/>
-              <a:t>8/9/2026</a:t>
+              <a:t>8/11/2026</a:t>
             </a:fld>
             <a:endParaRPr lang="en-US"/>
           </a:p>
@@ -526,7 +526,7 @@
           <a:p>
             <a:fld id="{18AFD033-9734-4099-AB24-E002C0C94B93}" type="datetimeFigureOut">
               <a:rPr lang="en-US" smtClean="0"/>
-              <a:t>8/9/2026</a:t>
+              <a:t>8/11/2026</a:t>
             </a:fld>
             <a:endParaRPr lang="en-US"/>
           </a:p>
@@ -734,7 +734,7 @@
           <a:p>
             <a:fld id="{18AFD033-9734-4099-AB24-E002C0C94B93}" type="datetimeFigureOut">
               <a:rPr lang="en-US" smtClean="0"/>
-              <a:t>8/9/2026</a:t>
+              <a:t>8/11/2026</a:t>
             </a:fld>
             <a:endParaRPr lang="en-US"/>
           </a:p>
@@ -932,7 +932,7 @@
           <a:p>
             <a:fld id="{18AFD033-9734-4099-AB24-E002C0C94B93}" type="datetimeFigureOut">
               <a:rPr lang="en-US" smtClean="0"/>
-              <a:t>8/9/2026</a:t>
+              <a:t>8/11/2026</a:t>
             </a:fld>
             <a:endParaRPr lang="en-US"/>
           </a:p>
@@ -1207,7 +1207,7 @@
           <a:p>
             <a:fld id="{18AFD033-9734-4099-AB24-E002C0C94B93}" type="datetimeFigureOut">
               <a:rPr lang="en-US" smtClean="0"/>
-              <a:t>8/9/2026</a:t>
+              <a:t>8/11/2026</a:t>
             </a:fld>
             <a:endParaRPr lang="en-US"/>
           </a:p>
@@ -1472,7 +1472,7 @@
           <a:p>
             <a:fld id="{18AFD033-9734-4099-AB24-E002C0C94B93}" type="datetimeFigureOut">
               <a:rPr lang="en-US" smtClean="0"/>
-              <a:t>8/9/2026</a:t>
+              <a:t>8/11/2026</a:t>
             </a:fld>
             <a:endParaRPr lang="en-US"/>
           </a:p>
@@ -1884,7 +1884,7 @@
           <a:p>
             <a:fld id="{18AFD033-9734-4099-AB24-E002C0C94B93}" type="datetimeFigureOut">
               <a:rPr lang="en-US" smtClean="0"/>
-              <a:t>8/9/2026</a:t>
+              <a:t>8/11/2026</a:t>
             </a:fld>
             <a:endParaRPr lang="en-US"/>
           </a:p>
@@ -2025,7 +2025,7 @@
           <a:p>
             <a:fld id="{18AFD033-9734-4099-AB24-E002C0C94B93}" type="datetimeFigureOut">
               <a:rPr lang="en-US" smtClean="0"/>
-              <a:t>8/9/2026</a:t>
+              <a:t>8/11/2026</a:t>
             </a:fld>
             <a:endParaRPr lang="en-US"/>
           </a:p>
@@ -2138,7 +2138,7 @@
           <a:p>
             <a:fld id="{18AFD033-9734-4099-AB24-E002C0C94B93}" type="datetimeFigureOut">
               <a:rPr lang="en-US" smtClean="0"/>
-              <a:t>8/9/2026</a:t>
+              <a:t>8/11/2026</a:t>
             </a:fld>
             <a:endParaRPr lang="en-US"/>
           </a:p>
@@ -2449,7 +2449,7 @@
           <a:p>
             <a:fld id="{18AFD033-9734-4099-AB24-E002C0C94B93}" type="datetimeFigureOut">
               <a:rPr lang="en-US" smtClean="0"/>
-              <a:t>8/9/2026</a:t>
+              <a:t>8/11/2026</a:t>
             </a:fld>
             <a:endParaRPr lang="en-US"/>
           </a:p>
@@ -2737,7 +2737,7 @@
           <a:p>
             <a:fld id="{18AFD033-9734-4099-AB24-E002C0C94B93}" type="datetimeFigureOut">
               <a:rPr lang="en-US" smtClean="0"/>
-              <a:t>8/9/2026</a:t>
+              <a:t>8/11/2026</a:t>
             </a:fld>
             <a:endParaRPr lang="en-US"/>
           </a:p>
@@ -2978,7 +2978,7 @@
           <a:p>
             <a:fld id="{18AFD033-9734-4099-AB24-E002C0C94B93}" type="datetimeFigureOut">
               <a:rPr lang="en-US" smtClean="0"/>
-              <a:t>8/9/2026</a:t>
+              <a:t>8/11/2026</a:t>
             </a:fld>
             <a:endParaRPr lang="en-US"/>
           </a:p>
@@ -48125,7 +48125,7 @@
         </p:nvCxnSpPr>
         <p:spPr>
           <a:xfrm>
-            <a:off x="2659755" y="-2162667"/>
+            <a:off x="-5630879" y="-2257917"/>
             <a:ext cx="766173" cy="0"/>
           </a:xfrm>
           <a:prstGeom prst="line">
@@ -48176,7 +48176,7 @@
         </p:blipFill>
         <p:spPr>
           <a:xfrm>
-            <a:off x="3683836" y="-2407920"/>
+            <a:off x="-4606798" y="-2503170"/>
             <a:ext cx="3083614" cy="440516"/>
           </a:xfrm>
           <a:prstGeom prst="rect">
@@ -48212,7 +48212,7 @@
         </p:blipFill>
         <p:spPr>
           <a:xfrm>
-            <a:off x="11809902" y="-2407920"/>
+            <a:off x="185518" y="-2503170"/>
             <a:ext cx="3160096" cy="439200"/>
           </a:xfrm>
           <a:prstGeom prst="rect">
@@ -48236,7 +48236,7 @@
         </p:nvCxnSpPr>
         <p:spPr>
           <a:xfrm>
-            <a:off x="10785821" y="-2179833"/>
+            <a:off x="-838563" y="-2275083"/>
             <a:ext cx="766173" cy="0"/>
           </a:xfrm>
           <a:prstGeom prst="line">
@@ -48419,6 +48419,49 @@
           </a:p>
         </p:txBody>
       </p:sp>
+      <p:cxnSp>
+        <p:nvCxnSpPr>
+          <p:cNvPr id="4" name="Straight Connector 3">
+            <a:extLst>
+              <a:ext uri="{FF2B5EF4-FFF2-40B4-BE49-F238E27FC236}">
+                <a16:creationId xmlns:a16="http://schemas.microsoft.com/office/drawing/2014/main" id="{B08811EA-5753-3C99-68AA-B4B73D5237DE}"/>
+              </a:ext>
+            </a:extLst>
+          </p:cNvPr>
+          <p:cNvCxnSpPr>
+            <a:cxnSpLocks/>
+          </p:cNvCxnSpPr>
+          <p:nvPr/>
+        </p:nvCxnSpPr>
+        <p:spPr>
+          <a:xfrm>
+            <a:off x="-6386286" y="-1657350"/>
+            <a:ext cx="10402534" cy="0"/>
+          </a:xfrm>
+          <a:prstGeom prst="line">
+            <a:avLst/>
+          </a:prstGeom>
+          <a:ln w="38100">
+            <a:solidFill>
+              <a:schemeClr val="tx1"/>
+            </a:solidFill>
+          </a:ln>
+        </p:spPr>
+        <p:style>
+          <a:lnRef idx="2">
+            <a:schemeClr val="accent1"/>
+          </a:lnRef>
+          <a:fillRef idx="0">
+            <a:schemeClr val="accent1"/>
+          </a:fillRef>
+          <a:effectRef idx="1">
+            <a:schemeClr val="accent1"/>
+          </a:effectRef>
+          <a:fontRef idx="minor">
+            <a:schemeClr val="tx1"/>
+          </a:fontRef>
+        </p:style>
+      </p:cxnSp>
     </p:spTree>
     <p:extLst>
       <p:ext uri="{BB962C8B-B14F-4D97-AF65-F5344CB8AC3E}">
